--- a/Numerical Computing Python Slides.pptx
+++ b/Numerical Computing Python Slides.pptx
@@ -147,7 +147,7 @@
 <file path=ppt/revisionInfo.xml><?xml version="1.0" encoding="utf-8"?>
 <p1510:revInfo xmlns:a="http://schemas.openxmlformats.org/drawingml/2006/main" xmlns:r="http://schemas.openxmlformats.org/officeDocument/2006/relationships" xmlns:p1510="http://schemas.microsoft.com/office/powerpoint/2015/10/main">
   <p1510:revLst>
-    <p1510:client id="{A943292D-1852-4C7B-9CD6-987858146429}" v="3" dt="2025-10-24T08:52:23.417"/>
+    <p1510:client id="{DC929783-9FB4-4945-9270-891D02F365F8}" v="2" dt="2026-10-09T10:05:39.597"/>
   </p1510:revLst>
 </p1510:revInfo>
 </file>
@@ -155,1859 +155,59 @@
 <file path=ppt/changesInfos/changesInfo1.xml><?xml version="1.0" encoding="utf-8"?>
 <pc:chgInfo xmlns:a="http://schemas.openxmlformats.org/drawingml/2006/main" xmlns:r="http://schemas.openxmlformats.org/officeDocument/2006/relationships" xmlns:ac="http://schemas.microsoft.com/office/drawing/2013/main/command" xmlns:pc="http://schemas.microsoft.com/office/powerpoint/2013/main/command">
   <pc:docChgLst>
-    <pc:chgData name="Cooling, Chris" userId="6dcf99c9-2ba5-410a-8445-0893a3d1421f" providerId="ADAL" clId="{A943292D-1852-4C7B-9CD6-987858146429}"/>
-    <pc:docChg chg="custSel delSld modSld">
-      <pc:chgData name="Cooling, Chris" userId="6dcf99c9-2ba5-410a-8445-0893a3d1421f" providerId="ADAL" clId="{A943292D-1852-4C7B-9CD6-987858146429}" dt="2025-10-24T10:07:43.341" v="11" actId="47"/>
+    <pc:chgData name="Cooling, Chris" userId="6dcf99c9-2ba5-410a-8445-0893a3d1421f" providerId="ADAL" clId="{0564427D-CD1D-4B33-9C97-2A8069F97102}"/>
+    <pc:docChg chg="custSel modSld">
+      <pc:chgData name="Cooling, Chris" userId="6dcf99c9-2ba5-410a-8445-0893a3d1421f" providerId="ADAL" clId="{0564427D-CD1D-4B33-9C97-2A8069F97102}" dt="2026-10-09T10:05:44.900" v="9" actId="255"/>
       <pc:docMkLst>
         <pc:docMk/>
       </pc:docMkLst>
       <pc:sldChg chg="addSp delSp modSp mod">
-        <pc:chgData name="Cooling, Chris" userId="6dcf99c9-2ba5-410a-8445-0893a3d1421f" providerId="ADAL" clId="{A943292D-1852-4C7B-9CD6-987858146429}" dt="2025-10-24T08:52:32.146" v="10" actId="255"/>
+        <pc:chgData name="Cooling, Chris" userId="6dcf99c9-2ba5-410a-8445-0893a3d1421f" providerId="ADAL" clId="{0564427D-CD1D-4B33-9C97-2A8069F97102}" dt="2026-10-09T10:05:44.900" v="9" actId="255"/>
         <pc:sldMkLst>
           <pc:docMk/>
           <pc:sldMk cId="1507190070" sldId="359"/>
         </pc:sldMkLst>
+        <pc:spChg chg="del">
+          <ac:chgData name="Cooling, Chris" userId="6dcf99c9-2ba5-410a-8445-0893a3d1421f" providerId="ADAL" clId="{0564427D-CD1D-4B33-9C97-2A8069F97102}" dt="2026-10-09T10:05:05.159" v="1" actId="478"/>
+          <ac:spMkLst>
+            <pc:docMk/>
+            <pc:sldMk cId="1507190070" sldId="359"/>
+            <ac:spMk id="3" creationId="{20C7DBC8-6B4B-6860-9339-77D08AD9EA11}"/>
+          </ac:spMkLst>
+        </pc:spChg>
+        <pc:spChg chg="add del mod">
+          <ac:chgData name="Cooling, Chris" userId="6dcf99c9-2ba5-410a-8445-0893a3d1421f" providerId="ADAL" clId="{0564427D-CD1D-4B33-9C97-2A8069F97102}" dt="2026-10-09T10:05:07.121" v="2" actId="478"/>
+          <ac:spMkLst>
+            <pc:docMk/>
+            <pc:sldMk cId="1507190070" sldId="359"/>
+            <ac:spMk id="5" creationId="{47FA2857-A964-107D-C469-D0922207FF2B}"/>
+          </ac:spMkLst>
+        </pc:spChg>
         <pc:spChg chg="mod">
-          <ac:chgData name="Cooling, Chris" userId="6dcf99c9-2ba5-410a-8445-0893a3d1421f" providerId="ADAL" clId="{A943292D-1852-4C7B-9CD6-987858146429}" dt="2025-10-24T08:52:32.146" v="10" actId="255"/>
+          <ac:chgData name="Cooling, Chris" userId="6dcf99c9-2ba5-410a-8445-0893a3d1421f" providerId="ADAL" clId="{0564427D-CD1D-4B33-9C97-2A8069F97102}" dt="2026-10-09T10:05:44.900" v="9" actId="255"/>
           <ac:spMkLst>
             <pc:docMk/>
             <pc:sldMk cId="1507190070" sldId="359"/>
             <ac:spMk id="6" creationId="{F67B57BE-29B8-B7BA-15CB-930F83F6EB26}"/>
           </ac:spMkLst>
         </pc:spChg>
-        <pc:picChg chg="add mod">
-          <ac:chgData name="Cooling, Chris" userId="6dcf99c9-2ba5-410a-8445-0893a3d1421f" providerId="ADAL" clId="{A943292D-1852-4C7B-9CD6-987858146429}" dt="2025-10-16T13:16:45.606" v="7" actId="1076"/>
+        <pc:picChg chg="del">
+          <ac:chgData name="Cooling, Chris" userId="6dcf99c9-2ba5-410a-8445-0893a3d1421f" providerId="ADAL" clId="{0564427D-CD1D-4B33-9C97-2A8069F97102}" dt="2026-10-09T10:03:29.425" v="0" actId="478"/>
           <ac:picMkLst>
             <pc:docMk/>
             <pc:sldMk cId="1507190070" sldId="359"/>
             <ac:picMk id="10" creationId="{A20E0870-387C-038E-2FE2-610F7CDA6BCB}"/>
           </ac:picMkLst>
         </pc:picChg>
+        <pc:picChg chg="add mod">
+          <ac:chgData name="Cooling, Chris" userId="6dcf99c9-2ba5-410a-8445-0893a3d1421f" providerId="ADAL" clId="{0564427D-CD1D-4B33-9C97-2A8069F97102}" dt="2026-10-09T10:05:14.675" v="6" actId="14100"/>
+          <ac:picMkLst>
+            <pc:docMk/>
+            <pc:sldMk cId="1507190070" sldId="359"/>
+            <ac:picMk id="12" creationId="{F304293B-9097-C094-8B63-0AD5D0849CFF}"/>
+          </ac:picMkLst>
+        </pc:picChg>
       </pc:sldChg>
-      <pc:sldChg chg="del">
-        <pc:chgData name="Cooling, Chris" userId="6dcf99c9-2ba5-410a-8445-0893a3d1421f" providerId="ADAL" clId="{A943292D-1852-4C7B-9CD6-987858146429}" dt="2025-10-24T10:07:43.341" v="11" actId="47"/>
-        <pc:sldMkLst>
-          <pc:docMk/>
-          <pc:sldMk cId="3543295302" sldId="406"/>
-        </pc:sldMkLst>
-      </pc:sldChg>
-    </pc:docChg>
-  </pc:docChgLst>
-  <pc:docChgLst>
-    <pc:chgData name="Cooling, Chris" userId="6dcf99c9-2ba5-410a-8445-0893a3d1421f" providerId="ADAL" clId="{0D9F6B5F-15DB-4E57-8EA3-ECCAF60652A5}"/>
-    <pc:docChg chg="undo custSel addSld delSld modSld">
-      <pc:chgData name="Cooling, Chris" userId="6dcf99c9-2ba5-410a-8445-0893a3d1421f" providerId="ADAL" clId="{0D9F6B5F-15DB-4E57-8EA3-ECCAF60652A5}" dt="2024-10-16T09:46:46.470" v="416" actId="20577"/>
-      <pc:docMkLst>
-        <pc:docMk/>
-      </pc:docMkLst>
-      <pc:sldChg chg="modSp mod">
-        <pc:chgData name="Cooling, Chris" userId="6dcf99c9-2ba5-410a-8445-0893a3d1421f" providerId="ADAL" clId="{0D9F6B5F-15DB-4E57-8EA3-ECCAF60652A5}" dt="2024-10-16T09:26:57.732" v="76" actId="20577"/>
-        <pc:sldMkLst>
-          <pc:docMk/>
-          <pc:sldMk cId="3212729572" sldId="323"/>
-        </pc:sldMkLst>
-      </pc:sldChg>
-      <pc:sldChg chg="del">
-        <pc:chgData name="Cooling, Chris" userId="6dcf99c9-2ba5-410a-8445-0893a3d1421f" providerId="ADAL" clId="{0D9F6B5F-15DB-4E57-8EA3-ECCAF60652A5}" dt="2024-10-16T09:27:27.541" v="77" actId="47"/>
-        <pc:sldMkLst>
-          <pc:docMk/>
-          <pc:sldMk cId="474143756" sldId="324"/>
-        </pc:sldMkLst>
-      </pc:sldChg>
-      <pc:sldChg chg="del">
-        <pc:chgData name="Cooling, Chris" userId="6dcf99c9-2ba5-410a-8445-0893a3d1421f" providerId="ADAL" clId="{0D9F6B5F-15DB-4E57-8EA3-ECCAF60652A5}" dt="2024-10-16T09:29:20.214" v="82" actId="47"/>
-        <pc:sldMkLst>
-          <pc:docMk/>
-          <pc:sldMk cId="380350440" sldId="326"/>
-        </pc:sldMkLst>
-      </pc:sldChg>
-      <pc:sldChg chg="modSp mod">
-        <pc:chgData name="Cooling, Chris" userId="6dcf99c9-2ba5-410a-8445-0893a3d1421f" providerId="ADAL" clId="{0D9F6B5F-15DB-4E57-8EA3-ECCAF60652A5}" dt="2024-10-16T09:28:16.822" v="80" actId="255"/>
-        <pc:sldMkLst>
-          <pc:docMk/>
-          <pc:sldMk cId="16407505" sldId="361"/>
-        </pc:sldMkLst>
-      </pc:sldChg>
-      <pc:sldChg chg="del">
-        <pc:chgData name="Cooling, Chris" userId="6dcf99c9-2ba5-410a-8445-0893a3d1421f" providerId="ADAL" clId="{0D9F6B5F-15DB-4E57-8EA3-ECCAF60652A5}" dt="2024-10-16T09:29:05.308" v="81" actId="47"/>
-        <pc:sldMkLst>
-          <pc:docMk/>
-          <pc:sldMk cId="650368403" sldId="362"/>
-        </pc:sldMkLst>
-      </pc:sldChg>
-      <pc:sldChg chg="del">
-        <pc:chgData name="Cooling, Chris" userId="6dcf99c9-2ba5-410a-8445-0893a3d1421f" providerId="ADAL" clId="{0D9F6B5F-15DB-4E57-8EA3-ECCAF60652A5}" dt="2024-10-16T09:29:05.308" v="81" actId="47"/>
-        <pc:sldMkLst>
-          <pc:docMk/>
-          <pc:sldMk cId="3498346720" sldId="363"/>
-        </pc:sldMkLst>
-      </pc:sldChg>
-      <pc:sldChg chg="del">
-        <pc:chgData name="Cooling, Chris" userId="6dcf99c9-2ba5-410a-8445-0893a3d1421f" providerId="ADAL" clId="{0D9F6B5F-15DB-4E57-8EA3-ECCAF60652A5}" dt="2024-10-16T09:29:05.308" v="81" actId="47"/>
-        <pc:sldMkLst>
-          <pc:docMk/>
-          <pc:sldMk cId="721571596" sldId="364"/>
-        </pc:sldMkLst>
-      </pc:sldChg>
-      <pc:sldChg chg="del">
-        <pc:chgData name="Cooling, Chris" userId="6dcf99c9-2ba5-410a-8445-0893a3d1421f" providerId="ADAL" clId="{0D9F6B5F-15DB-4E57-8EA3-ECCAF60652A5}" dt="2024-10-16T09:29:05.308" v="81" actId="47"/>
-        <pc:sldMkLst>
-          <pc:docMk/>
-          <pc:sldMk cId="1370984878" sldId="365"/>
-        </pc:sldMkLst>
-      </pc:sldChg>
-      <pc:sldChg chg="del">
-        <pc:chgData name="Cooling, Chris" userId="6dcf99c9-2ba5-410a-8445-0893a3d1421f" providerId="ADAL" clId="{0D9F6B5F-15DB-4E57-8EA3-ECCAF60652A5}" dt="2024-10-16T09:29:05.308" v="81" actId="47"/>
-        <pc:sldMkLst>
-          <pc:docMk/>
-          <pc:sldMk cId="2862336388" sldId="366"/>
-        </pc:sldMkLst>
-      </pc:sldChg>
-      <pc:sldChg chg="del">
-        <pc:chgData name="Cooling, Chris" userId="6dcf99c9-2ba5-410a-8445-0893a3d1421f" providerId="ADAL" clId="{0D9F6B5F-15DB-4E57-8EA3-ECCAF60652A5}" dt="2024-10-16T09:29:05.308" v="81" actId="47"/>
-        <pc:sldMkLst>
-          <pc:docMk/>
-          <pc:sldMk cId="49263487" sldId="367"/>
-        </pc:sldMkLst>
-      </pc:sldChg>
-      <pc:sldChg chg="del">
-        <pc:chgData name="Cooling, Chris" userId="6dcf99c9-2ba5-410a-8445-0893a3d1421f" providerId="ADAL" clId="{0D9F6B5F-15DB-4E57-8EA3-ECCAF60652A5}" dt="2024-10-16T09:29:05.308" v="81" actId="47"/>
-        <pc:sldMkLst>
-          <pc:docMk/>
-          <pc:sldMk cId="3636830078" sldId="368"/>
-        </pc:sldMkLst>
-      </pc:sldChg>
-      <pc:sldChg chg="del">
-        <pc:chgData name="Cooling, Chris" userId="6dcf99c9-2ba5-410a-8445-0893a3d1421f" providerId="ADAL" clId="{0D9F6B5F-15DB-4E57-8EA3-ECCAF60652A5}" dt="2024-10-16T09:29:05.308" v="81" actId="47"/>
-        <pc:sldMkLst>
-          <pc:docMk/>
-          <pc:sldMk cId="1646575661" sldId="369"/>
-        </pc:sldMkLst>
-      </pc:sldChg>
-      <pc:sldChg chg="del">
-        <pc:chgData name="Cooling, Chris" userId="6dcf99c9-2ba5-410a-8445-0893a3d1421f" providerId="ADAL" clId="{0D9F6B5F-15DB-4E57-8EA3-ECCAF60652A5}" dt="2024-10-16T09:29:05.308" v="81" actId="47"/>
-        <pc:sldMkLst>
-          <pc:docMk/>
-          <pc:sldMk cId="919066874" sldId="370"/>
-        </pc:sldMkLst>
-      </pc:sldChg>
-      <pc:sldChg chg="del">
-        <pc:chgData name="Cooling, Chris" userId="6dcf99c9-2ba5-410a-8445-0893a3d1421f" providerId="ADAL" clId="{0D9F6B5F-15DB-4E57-8EA3-ECCAF60652A5}" dt="2024-10-16T09:29:05.308" v="81" actId="47"/>
-        <pc:sldMkLst>
-          <pc:docMk/>
-          <pc:sldMk cId="3388074364" sldId="371"/>
-        </pc:sldMkLst>
-      </pc:sldChg>
-      <pc:sldChg chg="del">
-        <pc:chgData name="Cooling, Chris" userId="6dcf99c9-2ba5-410a-8445-0893a3d1421f" providerId="ADAL" clId="{0D9F6B5F-15DB-4E57-8EA3-ECCAF60652A5}" dt="2024-10-16T09:29:05.308" v="81" actId="47"/>
-        <pc:sldMkLst>
-          <pc:docMk/>
-          <pc:sldMk cId="2099201432" sldId="372"/>
-        </pc:sldMkLst>
-      </pc:sldChg>
-      <pc:sldChg chg="del">
-        <pc:chgData name="Cooling, Chris" userId="6dcf99c9-2ba5-410a-8445-0893a3d1421f" providerId="ADAL" clId="{0D9F6B5F-15DB-4E57-8EA3-ECCAF60652A5}" dt="2024-10-16T09:29:05.308" v="81" actId="47"/>
-        <pc:sldMkLst>
-          <pc:docMk/>
-          <pc:sldMk cId="1204830268" sldId="373"/>
-        </pc:sldMkLst>
-      </pc:sldChg>
-      <pc:sldChg chg="del">
-        <pc:chgData name="Cooling, Chris" userId="6dcf99c9-2ba5-410a-8445-0893a3d1421f" providerId="ADAL" clId="{0D9F6B5F-15DB-4E57-8EA3-ECCAF60652A5}" dt="2024-10-16T09:29:05.308" v="81" actId="47"/>
-        <pc:sldMkLst>
-          <pc:docMk/>
-          <pc:sldMk cId="1108594804" sldId="374"/>
-        </pc:sldMkLst>
-      </pc:sldChg>
-      <pc:sldChg chg="del">
-        <pc:chgData name="Cooling, Chris" userId="6dcf99c9-2ba5-410a-8445-0893a3d1421f" providerId="ADAL" clId="{0D9F6B5F-15DB-4E57-8EA3-ECCAF60652A5}" dt="2024-10-16T09:29:05.308" v="81" actId="47"/>
-        <pc:sldMkLst>
-          <pc:docMk/>
-          <pc:sldMk cId="2224630467" sldId="375"/>
-        </pc:sldMkLst>
-      </pc:sldChg>
-      <pc:sldChg chg="del">
-        <pc:chgData name="Cooling, Chris" userId="6dcf99c9-2ba5-410a-8445-0893a3d1421f" providerId="ADAL" clId="{0D9F6B5F-15DB-4E57-8EA3-ECCAF60652A5}" dt="2024-10-16T09:29:05.308" v="81" actId="47"/>
-        <pc:sldMkLst>
-          <pc:docMk/>
-          <pc:sldMk cId="3847659151" sldId="376"/>
-        </pc:sldMkLst>
-      </pc:sldChg>
-      <pc:sldChg chg="del">
-        <pc:chgData name="Cooling, Chris" userId="6dcf99c9-2ba5-410a-8445-0893a3d1421f" providerId="ADAL" clId="{0D9F6B5F-15DB-4E57-8EA3-ECCAF60652A5}" dt="2024-10-16T09:29:05.308" v="81" actId="47"/>
-        <pc:sldMkLst>
-          <pc:docMk/>
-          <pc:sldMk cId="2673447316" sldId="377"/>
-        </pc:sldMkLst>
-      </pc:sldChg>
-      <pc:sldChg chg="del">
-        <pc:chgData name="Cooling, Chris" userId="6dcf99c9-2ba5-410a-8445-0893a3d1421f" providerId="ADAL" clId="{0D9F6B5F-15DB-4E57-8EA3-ECCAF60652A5}" dt="2024-10-16T09:29:05.308" v="81" actId="47"/>
-        <pc:sldMkLst>
-          <pc:docMk/>
-          <pc:sldMk cId="3995649870" sldId="378"/>
-        </pc:sldMkLst>
-      </pc:sldChg>
-      <pc:sldChg chg="del">
-        <pc:chgData name="Cooling, Chris" userId="6dcf99c9-2ba5-410a-8445-0893a3d1421f" providerId="ADAL" clId="{0D9F6B5F-15DB-4E57-8EA3-ECCAF60652A5}" dt="2024-10-16T09:29:05.308" v="81" actId="47"/>
-        <pc:sldMkLst>
-          <pc:docMk/>
-          <pc:sldMk cId="606499370" sldId="379"/>
-        </pc:sldMkLst>
-      </pc:sldChg>
-      <pc:sldChg chg="del">
-        <pc:chgData name="Cooling, Chris" userId="6dcf99c9-2ba5-410a-8445-0893a3d1421f" providerId="ADAL" clId="{0D9F6B5F-15DB-4E57-8EA3-ECCAF60652A5}" dt="2024-10-16T09:29:05.308" v="81" actId="47"/>
-        <pc:sldMkLst>
-          <pc:docMk/>
-          <pc:sldMk cId="534930278" sldId="380"/>
-        </pc:sldMkLst>
-      </pc:sldChg>
-      <pc:sldChg chg="del">
-        <pc:chgData name="Cooling, Chris" userId="6dcf99c9-2ba5-410a-8445-0893a3d1421f" providerId="ADAL" clId="{0D9F6B5F-15DB-4E57-8EA3-ECCAF60652A5}" dt="2024-10-16T09:29:05.308" v="81" actId="47"/>
-        <pc:sldMkLst>
-          <pc:docMk/>
-          <pc:sldMk cId="2605189886" sldId="381"/>
-        </pc:sldMkLst>
-      </pc:sldChg>
-      <pc:sldChg chg="del">
-        <pc:chgData name="Cooling, Chris" userId="6dcf99c9-2ba5-410a-8445-0893a3d1421f" providerId="ADAL" clId="{0D9F6B5F-15DB-4E57-8EA3-ECCAF60652A5}" dt="2024-10-16T09:29:05.308" v="81" actId="47"/>
-        <pc:sldMkLst>
-          <pc:docMk/>
-          <pc:sldMk cId="3637714125" sldId="382"/>
-        </pc:sldMkLst>
-      </pc:sldChg>
-      <pc:sldChg chg="del">
-        <pc:chgData name="Cooling, Chris" userId="6dcf99c9-2ba5-410a-8445-0893a3d1421f" providerId="ADAL" clId="{0D9F6B5F-15DB-4E57-8EA3-ECCAF60652A5}" dt="2024-10-16T09:29:05.308" v="81" actId="47"/>
-        <pc:sldMkLst>
-          <pc:docMk/>
-          <pc:sldMk cId="1793681033" sldId="383"/>
-        </pc:sldMkLst>
-      </pc:sldChg>
-      <pc:sldChg chg="del">
-        <pc:chgData name="Cooling, Chris" userId="6dcf99c9-2ba5-410a-8445-0893a3d1421f" providerId="ADAL" clId="{0D9F6B5F-15DB-4E57-8EA3-ECCAF60652A5}" dt="2024-10-16T09:29:05.308" v="81" actId="47"/>
-        <pc:sldMkLst>
-          <pc:docMk/>
-          <pc:sldMk cId="170370874" sldId="384"/>
-        </pc:sldMkLst>
-      </pc:sldChg>
-      <pc:sldChg chg="del">
-        <pc:chgData name="Cooling, Chris" userId="6dcf99c9-2ba5-410a-8445-0893a3d1421f" providerId="ADAL" clId="{0D9F6B5F-15DB-4E57-8EA3-ECCAF60652A5}" dt="2024-10-16T09:29:05.308" v="81" actId="47"/>
-        <pc:sldMkLst>
-          <pc:docMk/>
-          <pc:sldMk cId="3374749885" sldId="385"/>
-        </pc:sldMkLst>
-      </pc:sldChg>
-      <pc:sldChg chg="del">
-        <pc:chgData name="Cooling, Chris" userId="6dcf99c9-2ba5-410a-8445-0893a3d1421f" providerId="ADAL" clId="{0D9F6B5F-15DB-4E57-8EA3-ECCAF60652A5}" dt="2024-10-16T09:29:05.308" v="81" actId="47"/>
-        <pc:sldMkLst>
-          <pc:docMk/>
-          <pc:sldMk cId="3981322899" sldId="386"/>
-        </pc:sldMkLst>
-      </pc:sldChg>
-      <pc:sldChg chg="del">
-        <pc:chgData name="Cooling, Chris" userId="6dcf99c9-2ba5-410a-8445-0893a3d1421f" providerId="ADAL" clId="{0D9F6B5F-15DB-4E57-8EA3-ECCAF60652A5}" dt="2024-10-16T09:29:05.308" v="81" actId="47"/>
-        <pc:sldMkLst>
-          <pc:docMk/>
-          <pc:sldMk cId="2197734974" sldId="387"/>
-        </pc:sldMkLst>
-      </pc:sldChg>
-      <pc:sldChg chg="del">
-        <pc:chgData name="Cooling, Chris" userId="6dcf99c9-2ba5-410a-8445-0893a3d1421f" providerId="ADAL" clId="{0D9F6B5F-15DB-4E57-8EA3-ECCAF60652A5}" dt="2024-10-16T09:29:05.308" v="81" actId="47"/>
-        <pc:sldMkLst>
-          <pc:docMk/>
-          <pc:sldMk cId="3191437002" sldId="388"/>
-        </pc:sldMkLst>
-      </pc:sldChg>
-      <pc:sldChg chg="del">
-        <pc:chgData name="Cooling, Chris" userId="6dcf99c9-2ba5-410a-8445-0893a3d1421f" providerId="ADAL" clId="{0D9F6B5F-15DB-4E57-8EA3-ECCAF60652A5}" dt="2024-10-16T09:29:05.308" v="81" actId="47"/>
-        <pc:sldMkLst>
-          <pc:docMk/>
-          <pc:sldMk cId="3717795031" sldId="389"/>
-        </pc:sldMkLst>
-      </pc:sldChg>
-      <pc:sldChg chg="del">
-        <pc:chgData name="Cooling, Chris" userId="6dcf99c9-2ba5-410a-8445-0893a3d1421f" providerId="ADAL" clId="{0D9F6B5F-15DB-4E57-8EA3-ECCAF60652A5}" dt="2024-10-16T09:29:05.308" v="81" actId="47"/>
-        <pc:sldMkLst>
-          <pc:docMk/>
-          <pc:sldMk cId="2876155974" sldId="390"/>
-        </pc:sldMkLst>
-      </pc:sldChg>
-      <pc:sldChg chg="del">
-        <pc:chgData name="Cooling, Chris" userId="6dcf99c9-2ba5-410a-8445-0893a3d1421f" providerId="ADAL" clId="{0D9F6B5F-15DB-4E57-8EA3-ECCAF60652A5}" dt="2024-10-16T09:29:05.308" v="81" actId="47"/>
-        <pc:sldMkLst>
-          <pc:docMk/>
-          <pc:sldMk cId="3530089354" sldId="391"/>
-        </pc:sldMkLst>
-      </pc:sldChg>
-      <pc:sldChg chg="del">
-        <pc:chgData name="Cooling, Chris" userId="6dcf99c9-2ba5-410a-8445-0893a3d1421f" providerId="ADAL" clId="{0D9F6B5F-15DB-4E57-8EA3-ECCAF60652A5}" dt="2024-10-16T09:29:05.308" v="81" actId="47"/>
-        <pc:sldMkLst>
-          <pc:docMk/>
-          <pc:sldMk cId="3446637373" sldId="392"/>
-        </pc:sldMkLst>
-      </pc:sldChg>
-      <pc:sldChg chg="del">
-        <pc:chgData name="Cooling, Chris" userId="6dcf99c9-2ba5-410a-8445-0893a3d1421f" providerId="ADAL" clId="{0D9F6B5F-15DB-4E57-8EA3-ECCAF60652A5}" dt="2024-10-16T09:29:05.308" v="81" actId="47"/>
-        <pc:sldMkLst>
-          <pc:docMk/>
-          <pc:sldMk cId="620213683" sldId="393"/>
-        </pc:sldMkLst>
-      </pc:sldChg>
-      <pc:sldChg chg="del">
-        <pc:chgData name="Cooling, Chris" userId="6dcf99c9-2ba5-410a-8445-0893a3d1421f" providerId="ADAL" clId="{0D9F6B5F-15DB-4E57-8EA3-ECCAF60652A5}" dt="2024-10-16T09:29:05.308" v="81" actId="47"/>
-        <pc:sldMkLst>
-          <pc:docMk/>
-          <pc:sldMk cId="2690902426" sldId="394"/>
-        </pc:sldMkLst>
-      </pc:sldChg>
-      <pc:sldChg chg="del">
-        <pc:chgData name="Cooling, Chris" userId="6dcf99c9-2ba5-410a-8445-0893a3d1421f" providerId="ADAL" clId="{0D9F6B5F-15DB-4E57-8EA3-ECCAF60652A5}" dt="2024-10-16T09:29:05.308" v="81" actId="47"/>
-        <pc:sldMkLst>
-          <pc:docMk/>
-          <pc:sldMk cId="3761449199" sldId="395"/>
-        </pc:sldMkLst>
-      </pc:sldChg>
-      <pc:sldChg chg="del">
-        <pc:chgData name="Cooling, Chris" userId="6dcf99c9-2ba5-410a-8445-0893a3d1421f" providerId="ADAL" clId="{0D9F6B5F-15DB-4E57-8EA3-ECCAF60652A5}" dt="2024-10-16T09:29:05.308" v="81" actId="47"/>
-        <pc:sldMkLst>
-          <pc:docMk/>
-          <pc:sldMk cId="4103524331" sldId="396"/>
-        </pc:sldMkLst>
-      </pc:sldChg>
-      <pc:sldChg chg="del">
-        <pc:chgData name="Cooling, Chris" userId="6dcf99c9-2ba5-410a-8445-0893a3d1421f" providerId="ADAL" clId="{0D9F6B5F-15DB-4E57-8EA3-ECCAF60652A5}" dt="2024-10-16T09:29:05.308" v="81" actId="47"/>
-        <pc:sldMkLst>
-          <pc:docMk/>
-          <pc:sldMk cId="719251142" sldId="397"/>
-        </pc:sldMkLst>
-      </pc:sldChg>
-      <pc:sldChg chg="del">
-        <pc:chgData name="Cooling, Chris" userId="6dcf99c9-2ba5-410a-8445-0893a3d1421f" providerId="ADAL" clId="{0D9F6B5F-15DB-4E57-8EA3-ECCAF60652A5}" dt="2024-10-16T09:29:05.308" v="81" actId="47"/>
-        <pc:sldMkLst>
-          <pc:docMk/>
-          <pc:sldMk cId="3921319063" sldId="398"/>
-        </pc:sldMkLst>
-      </pc:sldChg>
-      <pc:sldChg chg="del">
-        <pc:chgData name="Cooling, Chris" userId="6dcf99c9-2ba5-410a-8445-0893a3d1421f" providerId="ADAL" clId="{0D9F6B5F-15DB-4E57-8EA3-ECCAF60652A5}" dt="2024-10-16T09:29:05.308" v="81" actId="47"/>
-        <pc:sldMkLst>
-          <pc:docMk/>
-          <pc:sldMk cId="3172791869" sldId="399"/>
-        </pc:sldMkLst>
-      </pc:sldChg>
-      <pc:sldChg chg="del">
-        <pc:chgData name="Cooling, Chris" userId="6dcf99c9-2ba5-410a-8445-0893a3d1421f" providerId="ADAL" clId="{0D9F6B5F-15DB-4E57-8EA3-ECCAF60652A5}" dt="2024-10-16T09:29:05.308" v="81" actId="47"/>
-        <pc:sldMkLst>
-          <pc:docMk/>
-          <pc:sldMk cId="1135729167" sldId="400"/>
-        </pc:sldMkLst>
-      </pc:sldChg>
-      <pc:sldChg chg="del">
-        <pc:chgData name="Cooling, Chris" userId="6dcf99c9-2ba5-410a-8445-0893a3d1421f" providerId="ADAL" clId="{0D9F6B5F-15DB-4E57-8EA3-ECCAF60652A5}" dt="2024-10-16T09:29:05.308" v="81" actId="47"/>
-        <pc:sldMkLst>
-          <pc:docMk/>
-          <pc:sldMk cId="737553104" sldId="401"/>
-        </pc:sldMkLst>
-      </pc:sldChg>
-      <pc:sldChg chg="del">
-        <pc:chgData name="Cooling, Chris" userId="6dcf99c9-2ba5-410a-8445-0893a3d1421f" providerId="ADAL" clId="{0D9F6B5F-15DB-4E57-8EA3-ECCAF60652A5}" dt="2024-10-16T09:29:05.308" v="81" actId="47"/>
-        <pc:sldMkLst>
-          <pc:docMk/>
-          <pc:sldMk cId="4021068231" sldId="402"/>
-        </pc:sldMkLst>
-      </pc:sldChg>
-      <pc:sldChg chg="del">
-        <pc:chgData name="Cooling, Chris" userId="6dcf99c9-2ba5-410a-8445-0893a3d1421f" providerId="ADAL" clId="{0D9F6B5F-15DB-4E57-8EA3-ECCAF60652A5}" dt="2024-10-16T09:29:05.308" v="81" actId="47"/>
-        <pc:sldMkLst>
-          <pc:docMk/>
-          <pc:sldMk cId="2500301249" sldId="403"/>
-        </pc:sldMkLst>
-      </pc:sldChg>
-      <pc:sldChg chg="del">
-        <pc:chgData name="Cooling, Chris" userId="6dcf99c9-2ba5-410a-8445-0893a3d1421f" providerId="ADAL" clId="{0D9F6B5F-15DB-4E57-8EA3-ECCAF60652A5}" dt="2024-10-16T09:29:05.308" v="81" actId="47"/>
-        <pc:sldMkLst>
-          <pc:docMk/>
-          <pc:sldMk cId="1407877688" sldId="404"/>
-        </pc:sldMkLst>
-      </pc:sldChg>
-      <pc:sldChg chg="del">
-        <pc:chgData name="Cooling, Chris" userId="6dcf99c9-2ba5-410a-8445-0893a3d1421f" providerId="ADAL" clId="{0D9F6B5F-15DB-4E57-8EA3-ECCAF60652A5}" dt="2024-10-16T09:29:05.308" v="81" actId="47"/>
-        <pc:sldMkLst>
-          <pc:docMk/>
-          <pc:sldMk cId="1607320822" sldId="405"/>
-        </pc:sldMkLst>
-      </pc:sldChg>
-      <pc:sldChg chg="modSp mod">
-        <pc:chgData name="Cooling, Chris" userId="6dcf99c9-2ba5-410a-8445-0893a3d1421f" providerId="ADAL" clId="{0D9F6B5F-15DB-4E57-8EA3-ECCAF60652A5}" dt="2024-10-16T09:46:46.470" v="416" actId="20577"/>
-        <pc:sldMkLst>
-          <pc:docMk/>
-          <pc:sldMk cId="4288594215" sldId="407"/>
-        </pc:sldMkLst>
-      </pc:sldChg>
-      <pc:sldChg chg="modSp add mod">
-        <pc:chgData name="Cooling, Chris" userId="6dcf99c9-2ba5-410a-8445-0893a3d1421f" providerId="ADAL" clId="{0D9F6B5F-15DB-4E57-8EA3-ECCAF60652A5}" dt="2024-10-16T09:30:04.626" v="103" actId="113"/>
-        <pc:sldMkLst>
-          <pc:docMk/>
-          <pc:sldMk cId="3343614994" sldId="408"/>
-        </pc:sldMkLst>
-      </pc:sldChg>
-    </pc:docChg>
-  </pc:docChgLst>
-  <pc:docChgLst>
-    <pc:chgData name="Cooling, Chris" userId="6dcf99c9-2ba5-410a-8445-0893a3d1421f" providerId="ADAL" clId="{A4555A67-39E2-49C7-B97F-147C6BD332AD}"/>
-    <pc:docChg chg="undo custSel modSld">
-      <pc:chgData name="Cooling, Chris" userId="6dcf99c9-2ba5-410a-8445-0893a3d1421f" providerId="ADAL" clId="{A4555A67-39E2-49C7-B97F-147C6BD332AD}" dt="2024-11-25T14:03:14.034" v="495" actId="20577"/>
-      <pc:docMkLst>
-        <pc:docMk/>
-      </pc:docMkLst>
-      <pc:sldChg chg="modSp mod">
-        <pc:chgData name="Cooling, Chris" userId="6dcf99c9-2ba5-410a-8445-0893a3d1421f" providerId="ADAL" clId="{A4555A67-39E2-49C7-B97F-147C6BD332AD}" dt="2024-11-25T09:52:21.276" v="49" actId="20577"/>
-        <pc:sldMkLst>
-          <pc:docMk/>
-          <pc:sldMk cId="3212729572" sldId="323"/>
-        </pc:sldMkLst>
-      </pc:sldChg>
-      <pc:sldChg chg="modSp mod">
-        <pc:chgData name="Cooling, Chris" userId="6dcf99c9-2ba5-410a-8445-0893a3d1421f" providerId="ADAL" clId="{A4555A67-39E2-49C7-B97F-147C6BD332AD}" dt="2024-11-25T09:53:08.141" v="55" actId="113"/>
-        <pc:sldMkLst>
-          <pc:docMk/>
-          <pc:sldMk cId="16407505" sldId="361"/>
-        </pc:sldMkLst>
-      </pc:sldChg>
-      <pc:sldChg chg="modSp mod">
-        <pc:chgData name="Cooling, Chris" userId="6dcf99c9-2ba5-410a-8445-0893a3d1421f" providerId="ADAL" clId="{A4555A67-39E2-49C7-B97F-147C6BD332AD}" dt="2024-11-25T14:03:14.034" v="495" actId="20577"/>
-        <pc:sldMkLst>
-          <pc:docMk/>
-          <pc:sldMk cId="4288594215" sldId="407"/>
-        </pc:sldMkLst>
-      </pc:sldChg>
-    </pc:docChg>
-  </pc:docChgLst>
-  <pc:docChgLst>
-    <pc:chgData name="Cooling, Chris" userId="6dcf99c9-2ba5-410a-8445-0893a3d1421f" providerId="ADAL" clId="{03CF33AC-D9E4-491F-8963-DAB5E6081A01}"/>
-    <pc:docChg chg="undo custSel addSld delSld modSld sldOrd">
-      <pc:chgData name="Cooling, Chris" userId="6dcf99c9-2ba5-410a-8445-0893a3d1421f" providerId="ADAL" clId="{03CF33AC-D9E4-491F-8963-DAB5E6081A01}" dt="2024-10-16T09:09:29.452" v="4301" actId="20577"/>
-      <pc:docMkLst>
-        <pc:docMk/>
-      </pc:docMkLst>
-      <pc:sldChg chg="del">
-        <pc:chgData name="Cooling, Chris" userId="6dcf99c9-2ba5-410a-8445-0893a3d1421f" providerId="ADAL" clId="{03CF33AC-D9E4-491F-8963-DAB5E6081A01}" dt="2024-10-07T10:01:12.048" v="12" actId="47"/>
-        <pc:sldMkLst>
-          <pc:docMk/>
-          <pc:sldMk cId="2509046592" sldId="260"/>
-        </pc:sldMkLst>
-      </pc:sldChg>
-      <pc:sldChg chg="del">
-        <pc:chgData name="Cooling, Chris" userId="6dcf99c9-2ba5-410a-8445-0893a3d1421f" providerId="ADAL" clId="{03CF33AC-D9E4-491F-8963-DAB5E6081A01}" dt="2024-10-07T10:01:12.048" v="12" actId="47"/>
-        <pc:sldMkLst>
-          <pc:docMk/>
-          <pc:sldMk cId="2440717809" sldId="262"/>
-        </pc:sldMkLst>
-      </pc:sldChg>
-      <pc:sldChg chg="del">
-        <pc:chgData name="Cooling, Chris" userId="6dcf99c9-2ba5-410a-8445-0893a3d1421f" providerId="ADAL" clId="{03CF33AC-D9E4-491F-8963-DAB5E6081A01}" dt="2024-10-07T10:01:12.048" v="12" actId="47"/>
-        <pc:sldMkLst>
-          <pc:docMk/>
-          <pc:sldMk cId="4280908608" sldId="263"/>
-        </pc:sldMkLst>
-      </pc:sldChg>
-      <pc:sldChg chg="del">
-        <pc:chgData name="Cooling, Chris" userId="6dcf99c9-2ba5-410a-8445-0893a3d1421f" providerId="ADAL" clId="{03CF33AC-D9E4-491F-8963-DAB5E6081A01}" dt="2024-10-07T10:01:12.048" v="12" actId="47"/>
-        <pc:sldMkLst>
-          <pc:docMk/>
-          <pc:sldMk cId="892137174" sldId="264"/>
-        </pc:sldMkLst>
-      </pc:sldChg>
-      <pc:sldChg chg="del">
-        <pc:chgData name="Cooling, Chris" userId="6dcf99c9-2ba5-410a-8445-0893a3d1421f" providerId="ADAL" clId="{03CF33AC-D9E4-491F-8963-DAB5E6081A01}" dt="2024-10-07T10:01:12.048" v="12" actId="47"/>
-        <pc:sldMkLst>
-          <pc:docMk/>
-          <pc:sldMk cId="3657803416" sldId="265"/>
-        </pc:sldMkLst>
-      </pc:sldChg>
-      <pc:sldChg chg="del">
-        <pc:chgData name="Cooling, Chris" userId="6dcf99c9-2ba5-410a-8445-0893a3d1421f" providerId="ADAL" clId="{03CF33AC-D9E4-491F-8963-DAB5E6081A01}" dt="2024-10-07T10:01:12.048" v="12" actId="47"/>
-        <pc:sldMkLst>
-          <pc:docMk/>
-          <pc:sldMk cId="1090473929" sldId="266"/>
-        </pc:sldMkLst>
-      </pc:sldChg>
-      <pc:sldChg chg="del">
-        <pc:chgData name="Cooling, Chris" userId="6dcf99c9-2ba5-410a-8445-0893a3d1421f" providerId="ADAL" clId="{03CF33AC-D9E4-491F-8963-DAB5E6081A01}" dt="2024-10-07T10:01:12.048" v="12" actId="47"/>
-        <pc:sldMkLst>
-          <pc:docMk/>
-          <pc:sldMk cId="2899002451" sldId="267"/>
-        </pc:sldMkLst>
-      </pc:sldChg>
-      <pc:sldChg chg="del">
-        <pc:chgData name="Cooling, Chris" userId="6dcf99c9-2ba5-410a-8445-0893a3d1421f" providerId="ADAL" clId="{03CF33AC-D9E4-491F-8963-DAB5E6081A01}" dt="2024-10-07T10:01:12.048" v="12" actId="47"/>
-        <pc:sldMkLst>
-          <pc:docMk/>
-          <pc:sldMk cId="219240684" sldId="268"/>
-        </pc:sldMkLst>
-      </pc:sldChg>
-      <pc:sldChg chg="del">
-        <pc:chgData name="Cooling, Chris" userId="6dcf99c9-2ba5-410a-8445-0893a3d1421f" providerId="ADAL" clId="{03CF33AC-D9E4-491F-8963-DAB5E6081A01}" dt="2024-10-07T10:01:12.048" v="12" actId="47"/>
-        <pc:sldMkLst>
-          <pc:docMk/>
-          <pc:sldMk cId="1591646720" sldId="269"/>
-        </pc:sldMkLst>
-      </pc:sldChg>
-      <pc:sldChg chg="del">
-        <pc:chgData name="Cooling, Chris" userId="6dcf99c9-2ba5-410a-8445-0893a3d1421f" providerId="ADAL" clId="{03CF33AC-D9E4-491F-8963-DAB5E6081A01}" dt="2024-10-07T10:01:12.048" v="12" actId="47"/>
-        <pc:sldMkLst>
-          <pc:docMk/>
-          <pc:sldMk cId="3902907092" sldId="270"/>
-        </pc:sldMkLst>
-      </pc:sldChg>
-      <pc:sldChg chg="del">
-        <pc:chgData name="Cooling, Chris" userId="6dcf99c9-2ba5-410a-8445-0893a3d1421f" providerId="ADAL" clId="{03CF33AC-D9E4-491F-8963-DAB5E6081A01}" dt="2024-10-07T10:01:12.048" v="12" actId="47"/>
-        <pc:sldMkLst>
-          <pc:docMk/>
-          <pc:sldMk cId="549157250" sldId="271"/>
-        </pc:sldMkLst>
-      </pc:sldChg>
-      <pc:sldChg chg="del">
-        <pc:chgData name="Cooling, Chris" userId="6dcf99c9-2ba5-410a-8445-0893a3d1421f" providerId="ADAL" clId="{03CF33AC-D9E4-491F-8963-DAB5E6081A01}" dt="2024-10-07T10:01:12.048" v="12" actId="47"/>
-        <pc:sldMkLst>
-          <pc:docMk/>
-          <pc:sldMk cId="260365935" sldId="273"/>
-        </pc:sldMkLst>
-      </pc:sldChg>
-      <pc:sldChg chg="del">
-        <pc:chgData name="Cooling, Chris" userId="6dcf99c9-2ba5-410a-8445-0893a3d1421f" providerId="ADAL" clId="{03CF33AC-D9E4-491F-8963-DAB5E6081A01}" dt="2024-10-07T10:01:23.237" v="13" actId="47"/>
-        <pc:sldMkLst>
-          <pc:docMk/>
-          <pc:sldMk cId="1031427888" sldId="276"/>
-        </pc:sldMkLst>
-      </pc:sldChg>
-      <pc:sldChg chg="addSp modSp add del mod modClrScheme chgLayout">
-        <pc:chgData name="Cooling, Chris" userId="6dcf99c9-2ba5-410a-8445-0893a3d1421f" providerId="ADAL" clId="{03CF33AC-D9E4-491F-8963-DAB5E6081A01}" dt="2024-10-09T08:24:54.016" v="77"/>
-        <pc:sldMkLst>
-          <pc:docMk/>
-          <pc:sldMk cId="3227858941" sldId="281"/>
-        </pc:sldMkLst>
-      </pc:sldChg>
-      <pc:sldChg chg="modSp add del mod">
-        <pc:chgData name="Cooling, Chris" userId="6dcf99c9-2ba5-410a-8445-0893a3d1421f" providerId="ADAL" clId="{03CF33AC-D9E4-491F-8963-DAB5E6081A01}" dt="2024-10-09T08:24:54.016" v="77"/>
-        <pc:sldMkLst>
-          <pc:docMk/>
-          <pc:sldMk cId="766773942" sldId="282"/>
-        </pc:sldMkLst>
-      </pc:sldChg>
-      <pc:sldChg chg="modSp add del mod">
-        <pc:chgData name="Cooling, Chris" userId="6dcf99c9-2ba5-410a-8445-0893a3d1421f" providerId="ADAL" clId="{03CF33AC-D9E4-491F-8963-DAB5E6081A01}" dt="2024-10-09T08:24:54.016" v="77"/>
-        <pc:sldMkLst>
-          <pc:docMk/>
-          <pc:sldMk cId="812463129" sldId="283"/>
-        </pc:sldMkLst>
-      </pc:sldChg>
-      <pc:sldChg chg="add del">
-        <pc:chgData name="Cooling, Chris" userId="6dcf99c9-2ba5-410a-8445-0893a3d1421f" providerId="ADAL" clId="{03CF33AC-D9E4-491F-8963-DAB5E6081A01}" dt="2024-10-09T08:24:54.016" v="77"/>
-        <pc:sldMkLst>
-          <pc:docMk/>
-          <pc:sldMk cId="2428056926" sldId="284"/>
-        </pc:sldMkLst>
-      </pc:sldChg>
-      <pc:sldChg chg="add del">
-        <pc:chgData name="Cooling, Chris" userId="6dcf99c9-2ba5-410a-8445-0893a3d1421f" providerId="ADAL" clId="{03CF33AC-D9E4-491F-8963-DAB5E6081A01}" dt="2024-10-09T08:24:54.016" v="77"/>
-        <pc:sldMkLst>
-          <pc:docMk/>
-          <pc:sldMk cId="735192102" sldId="285"/>
-        </pc:sldMkLst>
-      </pc:sldChg>
-      <pc:sldChg chg="del">
-        <pc:chgData name="Cooling, Chris" userId="6dcf99c9-2ba5-410a-8445-0893a3d1421f" providerId="ADAL" clId="{03CF33AC-D9E4-491F-8963-DAB5E6081A01}" dt="2024-10-07T10:01:12.048" v="12" actId="47"/>
-        <pc:sldMkLst>
-          <pc:docMk/>
-          <pc:sldMk cId="1961674838" sldId="286"/>
-        </pc:sldMkLst>
-      </pc:sldChg>
-      <pc:sldChg chg="add del">
-        <pc:chgData name="Cooling, Chris" userId="6dcf99c9-2ba5-410a-8445-0893a3d1421f" providerId="ADAL" clId="{03CF33AC-D9E4-491F-8963-DAB5E6081A01}" dt="2024-10-09T08:24:54.016" v="77"/>
-        <pc:sldMkLst>
-          <pc:docMk/>
-          <pc:sldMk cId="3966698890" sldId="286"/>
-        </pc:sldMkLst>
-      </pc:sldChg>
-      <pc:sldChg chg="add del">
-        <pc:chgData name="Cooling, Chris" userId="6dcf99c9-2ba5-410a-8445-0893a3d1421f" providerId="ADAL" clId="{03CF33AC-D9E4-491F-8963-DAB5E6081A01}" dt="2024-10-09T08:24:54.016" v="77"/>
-        <pc:sldMkLst>
-          <pc:docMk/>
-          <pc:sldMk cId="3168009626" sldId="287"/>
-        </pc:sldMkLst>
-      </pc:sldChg>
-      <pc:sldChg chg="add del">
-        <pc:chgData name="Cooling, Chris" userId="6dcf99c9-2ba5-410a-8445-0893a3d1421f" providerId="ADAL" clId="{03CF33AC-D9E4-491F-8963-DAB5E6081A01}" dt="2024-10-09T08:24:54.016" v="77"/>
-        <pc:sldMkLst>
-          <pc:docMk/>
-          <pc:sldMk cId="746547034" sldId="288"/>
-        </pc:sldMkLst>
-      </pc:sldChg>
-      <pc:sldChg chg="del">
-        <pc:chgData name="Cooling, Chris" userId="6dcf99c9-2ba5-410a-8445-0893a3d1421f" providerId="ADAL" clId="{03CF33AC-D9E4-491F-8963-DAB5E6081A01}" dt="2024-10-07T10:01:12.048" v="12" actId="47"/>
-        <pc:sldMkLst>
-          <pc:docMk/>
-          <pc:sldMk cId="3543483350" sldId="288"/>
-        </pc:sldMkLst>
-      </pc:sldChg>
-      <pc:sldChg chg="add del">
-        <pc:chgData name="Cooling, Chris" userId="6dcf99c9-2ba5-410a-8445-0893a3d1421f" providerId="ADAL" clId="{03CF33AC-D9E4-491F-8963-DAB5E6081A01}" dt="2024-10-09T08:24:54.016" v="77"/>
-        <pc:sldMkLst>
-          <pc:docMk/>
-          <pc:sldMk cId="2053716256" sldId="289"/>
-        </pc:sldMkLst>
-      </pc:sldChg>
-      <pc:sldChg chg="del">
-        <pc:chgData name="Cooling, Chris" userId="6dcf99c9-2ba5-410a-8445-0893a3d1421f" providerId="ADAL" clId="{03CF33AC-D9E4-491F-8963-DAB5E6081A01}" dt="2024-10-07T10:01:12.048" v="12" actId="47"/>
-        <pc:sldMkLst>
-          <pc:docMk/>
-          <pc:sldMk cId="4077175788" sldId="289"/>
-        </pc:sldMkLst>
-      </pc:sldChg>
-      <pc:sldChg chg="modSp add del mod">
-        <pc:chgData name="Cooling, Chris" userId="6dcf99c9-2ba5-410a-8445-0893a3d1421f" providerId="ADAL" clId="{03CF33AC-D9E4-491F-8963-DAB5E6081A01}" dt="2024-10-09T08:24:54.016" v="77"/>
-        <pc:sldMkLst>
-          <pc:docMk/>
-          <pc:sldMk cId="3140181227" sldId="292"/>
-        </pc:sldMkLst>
-      </pc:sldChg>
-      <pc:sldChg chg="del">
-        <pc:chgData name="Cooling, Chris" userId="6dcf99c9-2ba5-410a-8445-0893a3d1421f" providerId="ADAL" clId="{03CF33AC-D9E4-491F-8963-DAB5E6081A01}" dt="2024-10-07T10:01:12.048" v="12" actId="47"/>
-        <pc:sldMkLst>
-          <pc:docMk/>
-          <pc:sldMk cId="2602109094" sldId="293"/>
-        </pc:sldMkLst>
-      </pc:sldChg>
-      <pc:sldChg chg="del">
-        <pc:chgData name="Cooling, Chris" userId="6dcf99c9-2ba5-410a-8445-0893a3d1421f" providerId="ADAL" clId="{03CF33AC-D9E4-491F-8963-DAB5E6081A01}" dt="2024-10-07T10:01:12.048" v="12" actId="47"/>
-        <pc:sldMkLst>
-          <pc:docMk/>
-          <pc:sldMk cId="624633227" sldId="294"/>
-        </pc:sldMkLst>
-      </pc:sldChg>
-      <pc:sldChg chg="add del">
-        <pc:chgData name="Cooling, Chris" userId="6dcf99c9-2ba5-410a-8445-0893a3d1421f" providerId="ADAL" clId="{03CF33AC-D9E4-491F-8963-DAB5E6081A01}" dt="2024-10-09T08:24:54.016" v="77"/>
-        <pc:sldMkLst>
-          <pc:docMk/>
-          <pc:sldMk cId="2454815734" sldId="294"/>
-        </pc:sldMkLst>
-      </pc:sldChg>
-      <pc:sldChg chg="del">
-        <pc:chgData name="Cooling, Chris" userId="6dcf99c9-2ba5-410a-8445-0893a3d1421f" providerId="ADAL" clId="{03CF33AC-D9E4-491F-8963-DAB5E6081A01}" dt="2024-10-07T10:01:12.048" v="12" actId="47"/>
-        <pc:sldMkLst>
-          <pc:docMk/>
-          <pc:sldMk cId="3031389964" sldId="295"/>
-        </pc:sldMkLst>
-      </pc:sldChg>
-      <pc:sldChg chg="add del">
-        <pc:chgData name="Cooling, Chris" userId="6dcf99c9-2ba5-410a-8445-0893a3d1421f" providerId="ADAL" clId="{03CF33AC-D9E4-491F-8963-DAB5E6081A01}" dt="2024-10-09T08:24:54.016" v="77"/>
-        <pc:sldMkLst>
-          <pc:docMk/>
-          <pc:sldMk cId="3778418652" sldId="295"/>
-        </pc:sldMkLst>
-      </pc:sldChg>
-      <pc:sldChg chg="del">
-        <pc:chgData name="Cooling, Chris" userId="6dcf99c9-2ba5-410a-8445-0893a3d1421f" providerId="ADAL" clId="{03CF33AC-D9E4-491F-8963-DAB5E6081A01}" dt="2024-10-07T10:01:12.048" v="12" actId="47"/>
-        <pc:sldMkLst>
-          <pc:docMk/>
-          <pc:sldMk cId="1470460910" sldId="296"/>
-        </pc:sldMkLst>
-      </pc:sldChg>
-      <pc:sldChg chg="modSp add del mod">
-        <pc:chgData name="Cooling, Chris" userId="6dcf99c9-2ba5-410a-8445-0893a3d1421f" providerId="ADAL" clId="{03CF33AC-D9E4-491F-8963-DAB5E6081A01}" dt="2024-10-09T08:24:54.016" v="77"/>
-        <pc:sldMkLst>
-          <pc:docMk/>
-          <pc:sldMk cId="2849987525" sldId="296"/>
-        </pc:sldMkLst>
-      </pc:sldChg>
-      <pc:sldChg chg="add del">
-        <pc:chgData name="Cooling, Chris" userId="6dcf99c9-2ba5-410a-8445-0893a3d1421f" providerId="ADAL" clId="{03CF33AC-D9E4-491F-8963-DAB5E6081A01}" dt="2024-10-09T08:24:54.016" v="77"/>
-        <pc:sldMkLst>
-          <pc:docMk/>
-          <pc:sldMk cId="2599389758" sldId="297"/>
-        </pc:sldMkLst>
-      </pc:sldChg>
-      <pc:sldChg chg="del">
-        <pc:chgData name="Cooling, Chris" userId="6dcf99c9-2ba5-410a-8445-0893a3d1421f" providerId="ADAL" clId="{03CF33AC-D9E4-491F-8963-DAB5E6081A01}" dt="2024-10-07T10:01:12.048" v="12" actId="47"/>
-        <pc:sldMkLst>
-          <pc:docMk/>
-          <pc:sldMk cId="3329594451" sldId="297"/>
-        </pc:sldMkLst>
-      </pc:sldChg>
-      <pc:sldChg chg="del">
-        <pc:chgData name="Cooling, Chris" userId="6dcf99c9-2ba5-410a-8445-0893a3d1421f" providerId="ADAL" clId="{03CF33AC-D9E4-491F-8963-DAB5E6081A01}" dt="2024-10-07T10:01:12.048" v="12" actId="47"/>
-        <pc:sldMkLst>
-          <pc:docMk/>
-          <pc:sldMk cId="3735834741" sldId="298"/>
-        </pc:sldMkLst>
-      </pc:sldChg>
-      <pc:sldChg chg="del">
-        <pc:chgData name="Cooling, Chris" userId="6dcf99c9-2ba5-410a-8445-0893a3d1421f" providerId="ADAL" clId="{03CF33AC-D9E4-491F-8963-DAB5E6081A01}" dt="2024-10-07T10:01:12.048" v="12" actId="47"/>
-        <pc:sldMkLst>
-          <pc:docMk/>
-          <pc:sldMk cId="559510141" sldId="299"/>
-        </pc:sldMkLst>
-      </pc:sldChg>
-      <pc:sldChg chg="add del">
-        <pc:chgData name="Cooling, Chris" userId="6dcf99c9-2ba5-410a-8445-0893a3d1421f" providerId="ADAL" clId="{03CF33AC-D9E4-491F-8963-DAB5E6081A01}" dt="2024-10-09T08:24:54.016" v="77"/>
-        <pc:sldMkLst>
-          <pc:docMk/>
-          <pc:sldMk cId="3102632955" sldId="299"/>
-        </pc:sldMkLst>
-      </pc:sldChg>
-      <pc:sldChg chg="del">
-        <pc:chgData name="Cooling, Chris" userId="6dcf99c9-2ba5-410a-8445-0893a3d1421f" providerId="ADAL" clId="{03CF33AC-D9E4-491F-8963-DAB5E6081A01}" dt="2024-10-07T10:01:12.048" v="12" actId="47"/>
-        <pc:sldMkLst>
-          <pc:docMk/>
-          <pc:sldMk cId="777092763" sldId="300"/>
-        </pc:sldMkLst>
-      </pc:sldChg>
-      <pc:sldChg chg="modSp add del mod">
-        <pc:chgData name="Cooling, Chris" userId="6dcf99c9-2ba5-410a-8445-0893a3d1421f" providerId="ADAL" clId="{03CF33AC-D9E4-491F-8963-DAB5E6081A01}" dt="2024-10-09T08:24:54.016" v="77"/>
-        <pc:sldMkLst>
-          <pc:docMk/>
-          <pc:sldMk cId="3357951532" sldId="300"/>
-        </pc:sldMkLst>
-      </pc:sldChg>
-      <pc:sldChg chg="add del">
-        <pc:chgData name="Cooling, Chris" userId="6dcf99c9-2ba5-410a-8445-0893a3d1421f" providerId="ADAL" clId="{03CF33AC-D9E4-491F-8963-DAB5E6081A01}" dt="2024-10-09T08:24:54.016" v="77"/>
-        <pc:sldMkLst>
-          <pc:docMk/>
-          <pc:sldMk cId="453738133" sldId="301"/>
-        </pc:sldMkLst>
-      </pc:sldChg>
-      <pc:sldChg chg="add del">
-        <pc:chgData name="Cooling, Chris" userId="6dcf99c9-2ba5-410a-8445-0893a3d1421f" providerId="ADAL" clId="{03CF33AC-D9E4-491F-8963-DAB5E6081A01}" dt="2024-10-09T08:24:54.016" v="77"/>
-        <pc:sldMkLst>
-          <pc:docMk/>
-          <pc:sldMk cId="57580663" sldId="302"/>
-        </pc:sldMkLst>
-      </pc:sldChg>
-      <pc:sldChg chg="del">
-        <pc:chgData name="Cooling, Chris" userId="6dcf99c9-2ba5-410a-8445-0893a3d1421f" providerId="ADAL" clId="{03CF33AC-D9E4-491F-8963-DAB5E6081A01}" dt="2024-10-07T10:01:12.048" v="12" actId="47"/>
-        <pc:sldMkLst>
-          <pc:docMk/>
-          <pc:sldMk cId="2109535584" sldId="303"/>
-        </pc:sldMkLst>
-      </pc:sldChg>
-      <pc:sldChg chg="del">
-        <pc:chgData name="Cooling, Chris" userId="6dcf99c9-2ba5-410a-8445-0893a3d1421f" providerId="ADAL" clId="{03CF33AC-D9E4-491F-8963-DAB5E6081A01}" dt="2024-10-07T10:01:12.048" v="12" actId="47"/>
-        <pc:sldMkLst>
-          <pc:docMk/>
-          <pc:sldMk cId="1963070087" sldId="304"/>
-        </pc:sldMkLst>
-      </pc:sldChg>
-      <pc:sldChg chg="del">
-        <pc:chgData name="Cooling, Chris" userId="6dcf99c9-2ba5-410a-8445-0893a3d1421f" providerId="ADAL" clId="{03CF33AC-D9E4-491F-8963-DAB5E6081A01}" dt="2024-10-07T10:01:12.048" v="12" actId="47"/>
-        <pc:sldMkLst>
-          <pc:docMk/>
-          <pc:sldMk cId="1986365774" sldId="305"/>
-        </pc:sldMkLst>
-      </pc:sldChg>
-      <pc:sldChg chg="add del">
-        <pc:chgData name="Cooling, Chris" userId="6dcf99c9-2ba5-410a-8445-0893a3d1421f" providerId="ADAL" clId="{03CF33AC-D9E4-491F-8963-DAB5E6081A01}" dt="2024-10-09T08:24:54.016" v="77"/>
-        <pc:sldMkLst>
-          <pc:docMk/>
-          <pc:sldMk cId="2487598261" sldId="305"/>
-        </pc:sldMkLst>
-      </pc:sldChg>
-      <pc:sldChg chg="del">
-        <pc:chgData name="Cooling, Chris" userId="6dcf99c9-2ba5-410a-8445-0893a3d1421f" providerId="ADAL" clId="{03CF33AC-D9E4-491F-8963-DAB5E6081A01}" dt="2024-10-07T10:01:12.048" v="12" actId="47"/>
-        <pc:sldMkLst>
-          <pc:docMk/>
-          <pc:sldMk cId="2144980242" sldId="306"/>
-        </pc:sldMkLst>
-      </pc:sldChg>
-      <pc:sldChg chg="add del">
-        <pc:chgData name="Cooling, Chris" userId="6dcf99c9-2ba5-410a-8445-0893a3d1421f" providerId="ADAL" clId="{03CF33AC-D9E4-491F-8963-DAB5E6081A01}" dt="2024-10-09T08:24:54.016" v="77"/>
-        <pc:sldMkLst>
-          <pc:docMk/>
-          <pc:sldMk cId="2798413230" sldId="306"/>
-        </pc:sldMkLst>
-      </pc:sldChg>
-      <pc:sldChg chg="modSp add del mod">
-        <pc:chgData name="Cooling, Chris" userId="6dcf99c9-2ba5-410a-8445-0893a3d1421f" providerId="ADAL" clId="{03CF33AC-D9E4-491F-8963-DAB5E6081A01}" dt="2024-10-09T08:24:54.016" v="77"/>
-        <pc:sldMkLst>
-          <pc:docMk/>
-          <pc:sldMk cId="1390760873" sldId="307"/>
-        </pc:sldMkLst>
-      </pc:sldChg>
-      <pc:sldChg chg="del">
-        <pc:chgData name="Cooling, Chris" userId="6dcf99c9-2ba5-410a-8445-0893a3d1421f" providerId="ADAL" clId="{03CF33AC-D9E4-491F-8963-DAB5E6081A01}" dt="2024-10-07T10:01:12.048" v="12" actId="47"/>
-        <pc:sldMkLst>
-          <pc:docMk/>
-          <pc:sldMk cId="1605751224" sldId="307"/>
-        </pc:sldMkLst>
-      </pc:sldChg>
-      <pc:sldChg chg="add del">
-        <pc:chgData name="Cooling, Chris" userId="6dcf99c9-2ba5-410a-8445-0893a3d1421f" providerId="ADAL" clId="{03CF33AC-D9E4-491F-8963-DAB5E6081A01}" dt="2024-10-09T08:24:54.016" v="77"/>
-        <pc:sldMkLst>
-          <pc:docMk/>
-          <pc:sldMk cId="3749303348" sldId="308"/>
-        </pc:sldMkLst>
-      </pc:sldChg>
-      <pc:sldChg chg="add del">
-        <pc:chgData name="Cooling, Chris" userId="6dcf99c9-2ba5-410a-8445-0893a3d1421f" providerId="ADAL" clId="{03CF33AC-D9E4-491F-8963-DAB5E6081A01}" dt="2024-10-09T08:24:54.016" v="77"/>
-        <pc:sldMkLst>
-          <pc:docMk/>
-          <pc:sldMk cId="933885824" sldId="309"/>
-        </pc:sldMkLst>
-      </pc:sldChg>
-      <pc:sldChg chg="del">
-        <pc:chgData name="Cooling, Chris" userId="6dcf99c9-2ba5-410a-8445-0893a3d1421f" providerId="ADAL" clId="{03CF33AC-D9E4-491F-8963-DAB5E6081A01}" dt="2024-10-07T10:01:12.048" v="12" actId="47"/>
-        <pc:sldMkLst>
-          <pc:docMk/>
-          <pc:sldMk cId="1625291139" sldId="309"/>
-        </pc:sldMkLst>
-      </pc:sldChg>
-      <pc:sldChg chg="add del">
-        <pc:chgData name="Cooling, Chris" userId="6dcf99c9-2ba5-410a-8445-0893a3d1421f" providerId="ADAL" clId="{03CF33AC-D9E4-491F-8963-DAB5E6081A01}" dt="2024-10-09T08:24:54.016" v="77"/>
-        <pc:sldMkLst>
-          <pc:docMk/>
-          <pc:sldMk cId="1654254681" sldId="310"/>
-        </pc:sldMkLst>
-      </pc:sldChg>
-      <pc:sldChg chg="del">
-        <pc:chgData name="Cooling, Chris" userId="6dcf99c9-2ba5-410a-8445-0893a3d1421f" providerId="ADAL" clId="{03CF33AC-D9E4-491F-8963-DAB5E6081A01}" dt="2024-10-07T10:01:12.048" v="12" actId="47"/>
-        <pc:sldMkLst>
-          <pc:docMk/>
-          <pc:sldMk cId="2936075367" sldId="310"/>
-        </pc:sldMkLst>
-      </pc:sldChg>
-      <pc:sldChg chg="add del">
-        <pc:chgData name="Cooling, Chris" userId="6dcf99c9-2ba5-410a-8445-0893a3d1421f" providerId="ADAL" clId="{03CF33AC-D9E4-491F-8963-DAB5E6081A01}" dt="2024-10-09T08:24:54.016" v="77"/>
-        <pc:sldMkLst>
-          <pc:docMk/>
-          <pc:sldMk cId="2312507278" sldId="311"/>
-        </pc:sldMkLst>
-      </pc:sldChg>
-      <pc:sldChg chg="del">
-        <pc:chgData name="Cooling, Chris" userId="6dcf99c9-2ba5-410a-8445-0893a3d1421f" providerId="ADAL" clId="{03CF33AC-D9E4-491F-8963-DAB5E6081A01}" dt="2024-10-07T10:01:12.048" v="12" actId="47"/>
-        <pc:sldMkLst>
-          <pc:docMk/>
-          <pc:sldMk cId="3006217861" sldId="311"/>
-        </pc:sldMkLst>
-      </pc:sldChg>
-      <pc:sldChg chg="del">
-        <pc:chgData name="Cooling, Chris" userId="6dcf99c9-2ba5-410a-8445-0893a3d1421f" providerId="ADAL" clId="{03CF33AC-D9E4-491F-8963-DAB5E6081A01}" dt="2024-10-07T10:01:12.048" v="12" actId="47"/>
-        <pc:sldMkLst>
-          <pc:docMk/>
-          <pc:sldMk cId="2003892851" sldId="312"/>
-        </pc:sldMkLst>
-      </pc:sldChg>
-      <pc:sldChg chg="modSp add del mod">
-        <pc:chgData name="Cooling, Chris" userId="6dcf99c9-2ba5-410a-8445-0893a3d1421f" providerId="ADAL" clId="{03CF33AC-D9E4-491F-8963-DAB5E6081A01}" dt="2024-10-09T08:24:54.016" v="77"/>
-        <pc:sldMkLst>
-          <pc:docMk/>
-          <pc:sldMk cId="2539671263" sldId="312"/>
-        </pc:sldMkLst>
-      </pc:sldChg>
-      <pc:sldChg chg="add del">
-        <pc:chgData name="Cooling, Chris" userId="6dcf99c9-2ba5-410a-8445-0893a3d1421f" providerId="ADAL" clId="{03CF33AC-D9E4-491F-8963-DAB5E6081A01}" dt="2024-10-09T08:24:54.016" v="77"/>
-        <pc:sldMkLst>
-          <pc:docMk/>
-          <pc:sldMk cId="3744006074" sldId="313"/>
-        </pc:sldMkLst>
-      </pc:sldChg>
-      <pc:sldChg chg="del">
-        <pc:chgData name="Cooling, Chris" userId="6dcf99c9-2ba5-410a-8445-0893a3d1421f" providerId="ADAL" clId="{03CF33AC-D9E4-491F-8963-DAB5E6081A01}" dt="2024-10-07T10:01:12.048" v="12" actId="47"/>
-        <pc:sldMkLst>
-          <pc:docMk/>
-          <pc:sldMk cId="3899447933" sldId="313"/>
-        </pc:sldMkLst>
-      </pc:sldChg>
-      <pc:sldChg chg="del">
-        <pc:chgData name="Cooling, Chris" userId="6dcf99c9-2ba5-410a-8445-0893a3d1421f" providerId="ADAL" clId="{03CF33AC-D9E4-491F-8963-DAB5E6081A01}" dt="2024-10-07T10:01:12.048" v="12" actId="47"/>
-        <pc:sldMkLst>
-          <pc:docMk/>
-          <pc:sldMk cId="667031554" sldId="314"/>
-        </pc:sldMkLst>
-      </pc:sldChg>
-      <pc:sldChg chg="add del">
-        <pc:chgData name="Cooling, Chris" userId="6dcf99c9-2ba5-410a-8445-0893a3d1421f" providerId="ADAL" clId="{03CF33AC-D9E4-491F-8963-DAB5E6081A01}" dt="2024-10-09T08:24:54.016" v="77"/>
-        <pc:sldMkLst>
-          <pc:docMk/>
-          <pc:sldMk cId="1378110722" sldId="314"/>
-        </pc:sldMkLst>
-      </pc:sldChg>
-      <pc:sldChg chg="add del">
-        <pc:chgData name="Cooling, Chris" userId="6dcf99c9-2ba5-410a-8445-0893a3d1421f" providerId="ADAL" clId="{03CF33AC-D9E4-491F-8963-DAB5E6081A01}" dt="2024-10-09T08:24:54.016" v="77"/>
-        <pc:sldMkLst>
-          <pc:docMk/>
-          <pc:sldMk cId="3968020684" sldId="315"/>
-        </pc:sldMkLst>
-      </pc:sldChg>
-      <pc:sldChg chg="add del">
-        <pc:chgData name="Cooling, Chris" userId="6dcf99c9-2ba5-410a-8445-0893a3d1421f" providerId="ADAL" clId="{03CF33AC-D9E4-491F-8963-DAB5E6081A01}" dt="2024-10-09T08:24:54.016" v="77"/>
-        <pc:sldMkLst>
-          <pc:docMk/>
-          <pc:sldMk cId="3897677485" sldId="316"/>
-        </pc:sldMkLst>
-      </pc:sldChg>
-      <pc:sldChg chg="add del">
-        <pc:chgData name="Cooling, Chris" userId="6dcf99c9-2ba5-410a-8445-0893a3d1421f" providerId="ADAL" clId="{03CF33AC-D9E4-491F-8963-DAB5E6081A01}" dt="2024-10-09T08:24:54.016" v="77"/>
-        <pc:sldMkLst>
-          <pc:docMk/>
-          <pc:sldMk cId="2040837939" sldId="317"/>
-        </pc:sldMkLst>
-      </pc:sldChg>
-      <pc:sldChg chg="add del">
-        <pc:chgData name="Cooling, Chris" userId="6dcf99c9-2ba5-410a-8445-0893a3d1421f" providerId="ADAL" clId="{03CF33AC-D9E4-491F-8963-DAB5E6081A01}" dt="2024-10-09T08:24:54.016" v="77"/>
-        <pc:sldMkLst>
-          <pc:docMk/>
-          <pc:sldMk cId="3162482540" sldId="318"/>
-        </pc:sldMkLst>
-      </pc:sldChg>
-      <pc:sldChg chg="add del">
-        <pc:chgData name="Cooling, Chris" userId="6dcf99c9-2ba5-410a-8445-0893a3d1421f" providerId="ADAL" clId="{03CF33AC-D9E4-491F-8963-DAB5E6081A01}" dt="2024-10-09T08:24:54.016" v="77"/>
-        <pc:sldMkLst>
-          <pc:docMk/>
-          <pc:sldMk cId="265627358" sldId="319"/>
-        </pc:sldMkLst>
-      </pc:sldChg>
-      <pc:sldChg chg="del">
-        <pc:chgData name="Cooling, Chris" userId="6dcf99c9-2ba5-410a-8445-0893a3d1421f" providerId="ADAL" clId="{03CF33AC-D9E4-491F-8963-DAB5E6081A01}" dt="2024-10-07T10:01:12.048" v="12" actId="47"/>
-        <pc:sldMkLst>
-          <pc:docMk/>
-          <pc:sldMk cId="4162562936" sldId="319"/>
-        </pc:sldMkLst>
-      </pc:sldChg>
-      <pc:sldChg chg="del">
-        <pc:chgData name="Cooling, Chris" userId="6dcf99c9-2ba5-410a-8445-0893a3d1421f" providerId="ADAL" clId="{03CF33AC-D9E4-491F-8963-DAB5E6081A01}" dt="2024-10-07T10:01:12.048" v="12" actId="47"/>
-        <pc:sldMkLst>
-          <pc:docMk/>
-          <pc:sldMk cId="3203343339" sldId="320"/>
-        </pc:sldMkLst>
-      </pc:sldChg>
-      <pc:sldChg chg="add del">
-        <pc:chgData name="Cooling, Chris" userId="6dcf99c9-2ba5-410a-8445-0893a3d1421f" providerId="ADAL" clId="{03CF33AC-D9E4-491F-8963-DAB5E6081A01}" dt="2024-10-09T08:24:54.016" v="77"/>
-        <pc:sldMkLst>
-          <pc:docMk/>
-          <pc:sldMk cId="3716300829" sldId="320"/>
-        </pc:sldMkLst>
-      </pc:sldChg>
-      <pc:sldChg chg="del">
-        <pc:chgData name="Cooling, Chris" userId="6dcf99c9-2ba5-410a-8445-0893a3d1421f" providerId="ADAL" clId="{03CF33AC-D9E4-491F-8963-DAB5E6081A01}" dt="2024-10-07T10:01:12.048" v="12" actId="47"/>
-        <pc:sldMkLst>
-          <pc:docMk/>
-          <pc:sldMk cId="2914583150" sldId="321"/>
-        </pc:sldMkLst>
-      </pc:sldChg>
-      <pc:sldChg chg="del">
-        <pc:chgData name="Cooling, Chris" userId="6dcf99c9-2ba5-410a-8445-0893a3d1421f" providerId="ADAL" clId="{03CF33AC-D9E4-491F-8963-DAB5E6081A01}" dt="2024-10-07T10:00:20.101" v="0" actId="47"/>
-        <pc:sldMkLst>
-          <pc:docMk/>
-          <pc:sldMk cId="4254443235" sldId="322"/>
-        </pc:sldMkLst>
-      </pc:sldChg>
-      <pc:sldChg chg="add del">
-        <pc:chgData name="Cooling, Chris" userId="6dcf99c9-2ba5-410a-8445-0893a3d1421f" providerId="ADAL" clId="{03CF33AC-D9E4-491F-8963-DAB5E6081A01}" dt="2024-10-09T08:24:54.016" v="77"/>
-        <pc:sldMkLst>
-          <pc:docMk/>
-          <pc:sldMk cId="200963720" sldId="323"/>
-        </pc:sldMkLst>
-      </pc:sldChg>
-      <pc:sldChg chg="del">
-        <pc:chgData name="Cooling, Chris" userId="6dcf99c9-2ba5-410a-8445-0893a3d1421f" providerId="ADAL" clId="{03CF33AC-D9E4-491F-8963-DAB5E6081A01}" dt="2024-10-07T10:00:20.101" v="0" actId="47"/>
-        <pc:sldMkLst>
-          <pc:docMk/>
-          <pc:sldMk cId="3212729572" sldId="323"/>
-        </pc:sldMkLst>
-      </pc:sldChg>
-      <pc:sldChg chg="modSp mod">
-        <pc:chgData name="Cooling, Chris" userId="6dcf99c9-2ba5-410a-8445-0893a3d1421f" providerId="ADAL" clId="{03CF33AC-D9E4-491F-8963-DAB5E6081A01}" dt="2024-10-07T10:00:45.879" v="10"/>
-        <pc:sldMkLst>
-          <pc:docMk/>
-          <pc:sldMk cId="474143756" sldId="324"/>
-        </pc:sldMkLst>
-      </pc:sldChg>
-      <pc:sldChg chg="modSp add del mod">
-        <pc:chgData name="Cooling, Chris" userId="6dcf99c9-2ba5-410a-8445-0893a3d1421f" providerId="ADAL" clId="{03CF33AC-D9E4-491F-8963-DAB5E6081A01}" dt="2024-10-09T08:24:54.016" v="77"/>
-        <pc:sldMkLst>
-          <pc:docMk/>
-          <pc:sldMk cId="3173781080" sldId="325"/>
-        </pc:sldMkLst>
-      </pc:sldChg>
-      <pc:sldChg chg="del">
-        <pc:chgData name="Cooling, Chris" userId="6dcf99c9-2ba5-410a-8445-0893a3d1421f" providerId="ADAL" clId="{03CF33AC-D9E4-491F-8963-DAB5E6081A01}" dt="2024-10-07T10:00:23.468" v="1" actId="47"/>
-        <pc:sldMkLst>
-          <pc:docMk/>
-          <pc:sldMk cId="3528320225" sldId="325"/>
-        </pc:sldMkLst>
-      </pc:sldChg>
-      <pc:sldChg chg="add del modNotesTx">
-        <pc:chgData name="Cooling, Chris" userId="6dcf99c9-2ba5-410a-8445-0893a3d1421f" providerId="ADAL" clId="{03CF33AC-D9E4-491F-8963-DAB5E6081A01}" dt="2024-10-11T11:01:39.595" v="3725" actId="20577"/>
-        <pc:sldMkLst>
-          <pc:docMk/>
-          <pc:sldMk cId="380350440" sldId="326"/>
-        </pc:sldMkLst>
-      </pc:sldChg>
-      <pc:sldChg chg="add del">
-        <pc:chgData name="Cooling, Chris" userId="6dcf99c9-2ba5-410a-8445-0893a3d1421f" providerId="ADAL" clId="{03CF33AC-D9E4-491F-8963-DAB5E6081A01}" dt="2024-10-09T08:24:54.016" v="77"/>
-        <pc:sldMkLst>
-          <pc:docMk/>
-          <pc:sldMk cId="3835658580" sldId="326"/>
-        </pc:sldMkLst>
-      </pc:sldChg>
-      <pc:sldChg chg="del">
-        <pc:chgData name="Cooling, Chris" userId="6dcf99c9-2ba5-410a-8445-0893a3d1421f" providerId="ADAL" clId="{03CF33AC-D9E4-491F-8963-DAB5E6081A01}" dt="2024-10-07T10:01:12.048" v="12" actId="47"/>
-        <pc:sldMkLst>
-          <pc:docMk/>
-          <pc:sldMk cId="680408341" sldId="327"/>
-        </pc:sldMkLst>
-      </pc:sldChg>
-      <pc:sldChg chg="add del">
-        <pc:chgData name="Cooling, Chris" userId="6dcf99c9-2ba5-410a-8445-0893a3d1421f" providerId="ADAL" clId="{03CF33AC-D9E4-491F-8963-DAB5E6081A01}" dt="2024-10-09T08:24:54.016" v="77"/>
-        <pc:sldMkLst>
-          <pc:docMk/>
-          <pc:sldMk cId="2646455873" sldId="327"/>
-        </pc:sldMkLst>
-      </pc:sldChg>
-      <pc:sldChg chg="add del">
-        <pc:chgData name="Cooling, Chris" userId="6dcf99c9-2ba5-410a-8445-0893a3d1421f" providerId="ADAL" clId="{03CF33AC-D9E4-491F-8963-DAB5E6081A01}" dt="2024-10-09T08:24:54.016" v="77"/>
-        <pc:sldMkLst>
-          <pc:docMk/>
-          <pc:sldMk cId="721358061" sldId="328"/>
-        </pc:sldMkLst>
-      </pc:sldChg>
-      <pc:sldChg chg="del">
-        <pc:chgData name="Cooling, Chris" userId="6dcf99c9-2ba5-410a-8445-0893a3d1421f" providerId="ADAL" clId="{03CF33AC-D9E4-491F-8963-DAB5E6081A01}" dt="2024-10-07T10:01:12.048" v="12" actId="47"/>
-        <pc:sldMkLst>
-          <pc:docMk/>
-          <pc:sldMk cId="1500357233" sldId="328"/>
-        </pc:sldMkLst>
-      </pc:sldChg>
-      <pc:sldChg chg="add del">
-        <pc:chgData name="Cooling, Chris" userId="6dcf99c9-2ba5-410a-8445-0893a3d1421f" providerId="ADAL" clId="{03CF33AC-D9E4-491F-8963-DAB5E6081A01}" dt="2024-10-09T08:24:54.016" v="77"/>
-        <pc:sldMkLst>
-          <pc:docMk/>
-          <pc:sldMk cId="2899337003" sldId="329"/>
-        </pc:sldMkLst>
-      </pc:sldChg>
-      <pc:sldChg chg="del">
-        <pc:chgData name="Cooling, Chris" userId="6dcf99c9-2ba5-410a-8445-0893a3d1421f" providerId="ADAL" clId="{03CF33AC-D9E4-491F-8963-DAB5E6081A01}" dt="2024-10-07T10:01:12.048" v="12" actId="47"/>
-        <pc:sldMkLst>
-          <pc:docMk/>
-          <pc:sldMk cId="3005038552" sldId="329"/>
-        </pc:sldMkLst>
-      </pc:sldChg>
-      <pc:sldChg chg="del">
-        <pc:chgData name="Cooling, Chris" userId="6dcf99c9-2ba5-410a-8445-0893a3d1421f" providerId="ADAL" clId="{03CF33AC-D9E4-491F-8963-DAB5E6081A01}" dt="2024-10-07T10:01:12.048" v="12" actId="47"/>
-        <pc:sldMkLst>
-          <pc:docMk/>
-          <pc:sldMk cId="266649059" sldId="330"/>
-        </pc:sldMkLst>
-      </pc:sldChg>
-      <pc:sldChg chg="add del">
-        <pc:chgData name="Cooling, Chris" userId="6dcf99c9-2ba5-410a-8445-0893a3d1421f" providerId="ADAL" clId="{03CF33AC-D9E4-491F-8963-DAB5E6081A01}" dt="2024-10-09T08:24:54.016" v="77"/>
-        <pc:sldMkLst>
-          <pc:docMk/>
-          <pc:sldMk cId="3099411356" sldId="330"/>
-        </pc:sldMkLst>
-      </pc:sldChg>
-      <pc:sldChg chg="del">
-        <pc:chgData name="Cooling, Chris" userId="6dcf99c9-2ba5-410a-8445-0893a3d1421f" providerId="ADAL" clId="{03CF33AC-D9E4-491F-8963-DAB5E6081A01}" dt="2024-10-07T10:01:12.048" v="12" actId="47"/>
-        <pc:sldMkLst>
-          <pc:docMk/>
-          <pc:sldMk cId="356225027" sldId="331"/>
-        </pc:sldMkLst>
-      </pc:sldChg>
-      <pc:sldChg chg="add del">
-        <pc:chgData name="Cooling, Chris" userId="6dcf99c9-2ba5-410a-8445-0893a3d1421f" providerId="ADAL" clId="{03CF33AC-D9E4-491F-8963-DAB5E6081A01}" dt="2024-10-09T08:24:54.016" v="77"/>
-        <pc:sldMkLst>
-          <pc:docMk/>
-          <pc:sldMk cId="2958191099" sldId="331"/>
-        </pc:sldMkLst>
-      </pc:sldChg>
-      <pc:sldChg chg="add del">
-        <pc:chgData name="Cooling, Chris" userId="6dcf99c9-2ba5-410a-8445-0893a3d1421f" providerId="ADAL" clId="{03CF33AC-D9E4-491F-8963-DAB5E6081A01}" dt="2024-10-09T08:24:54.016" v="77"/>
-        <pc:sldMkLst>
-          <pc:docMk/>
-          <pc:sldMk cId="1839592679" sldId="332"/>
-        </pc:sldMkLst>
-      </pc:sldChg>
-      <pc:sldChg chg="del">
-        <pc:chgData name="Cooling, Chris" userId="6dcf99c9-2ba5-410a-8445-0893a3d1421f" providerId="ADAL" clId="{03CF33AC-D9E4-491F-8963-DAB5E6081A01}" dt="2024-10-07T10:01:12.048" v="12" actId="47"/>
-        <pc:sldMkLst>
-          <pc:docMk/>
-          <pc:sldMk cId="3685198326" sldId="332"/>
-        </pc:sldMkLst>
-      </pc:sldChg>
-      <pc:sldChg chg="del">
-        <pc:chgData name="Cooling, Chris" userId="6dcf99c9-2ba5-410a-8445-0893a3d1421f" providerId="ADAL" clId="{03CF33AC-D9E4-491F-8963-DAB5E6081A01}" dt="2024-10-07T10:01:12.048" v="12" actId="47"/>
-        <pc:sldMkLst>
-          <pc:docMk/>
-          <pc:sldMk cId="1410114096" sldId="333"/>
-        </pc:sldMkLst>
-      </pc:sldChg>
-      <pc:sldChg chg="add del">
-        <pc:chgData name="Cooling, Chris" userId="6dcf99c9-2ba5-410a-8445-0893a3d1421f" providerId="ADAL" clId="{03CF33AC-D9E4-491F-8963-DAB5E6081A01}" dt="2024-10-09T08:24:54.016" v="77"/>
-        <pc:sldMkLst>
-          <pc:docMk/>
-          <pc:sldMk cId="1971978791" sldId="333"/>
-        </pc:sldMkLst>
-      </pc:sldChg>
-      <pc:sldChg chg="add">
-        <pc:chgData name="Cooling, Chris" userId="6dcf99c9-2ba5-410a-8445-0893a3d1421f" providerId="ADAL" clId="{03CF33AC-D9E4-491F-8963-DAB5E6081A01}" dt="2024-10-07T10:00:56.106" v="11"/>
-        <pc:sldMkLst>
-          <pc:docMk/>
-          <pc:sldMk cId="243918697" sldId="334"/>
-        </pc:sldMkLst>
-      </pc:sldChg>
-      <pc:sldChg chg="add">
-        <pc:chgData name="Cooling, Chris" userId="6dcf99c9-2ba5-410a-8445-0893a3d1421f" providerId="ADAL" clId="{03CF33AC-D9E4-491F-8963-DAB5E6081A01}" dt="2024-10-07T10:01:32.024" v="14"/>
-        <pc:sldMkLst>
-          <pc:docMk/>
-          <pc:sldMk cId="1507190070" sldId="359"/>
-        </pc:sldMkLst>
-      </pc:sldChg>
-      <pc:sldChg chg="modSp add mod">
-        <pc:chgData name="Cooling, Chris" userId="6dcf99c9-2ba5-410a-8445-0893a3d1421f" providerId="ADAL" clId="{03CF33AC-D9E4-491F-8963-DAB5E6081A01}" dt="2024-10-07T10:02:34.276" v="23" actId="12"/>
-        <pc:sldMkLst>
-          <pc:docMk/>
-          <pc:sldMk cId="16407505" sldId="361"/>
-        </pc:sldMkLst>
-      </pc:sldChg>
-      <pc:sldChg chg="addSp delSp modSp add mod modNotesTx">
-        <pc:chgData name="Cooling, Chris" userId="6dcf99c9-2ba5-410a-8445-0893a3d1421f" providerId="ADAL" clId="{03CF33AC-D9E4-491F-8963-DAB5E6081A01}" dt="2024-10-09T08:27:38.886" v="95"/>
-        <pc:sldMkLst>
-          <pc:docMk/>
-          <pc:sldMk cId="650368403" sldId="362"/>
-        </pc:sldMkLst>
-      </pc:sldChg>
-      <pc:sldChg chg="add del">
-        <pc:chgData name="Cooling, Chris" userId="6dcf99c9-2ba5-410a-8445-0893a3d1421f" providerId="ADAL" clId="{03CF33AC-D9E4-491F-8963-DAB5E6081A01}" dt="2024-10-09T08:24:54.016" v="77"/>
-        <pc:sldMkLst>
-          <pc:docMk/>
-          <pc:sldMk cId="813487936" sldId="362"/>
-        </pc:sldMkLst>
-      </pc:sldChg>
-      <pc:sldChg chg="add del">
-        <pc:chgData name="Cooling, Chris" userId="6dcf99c9-2ba5-410a-8445-0893a3d1421f" providerId="ADAL" clId="{03CF33AC-D9E4-491F-8963-DAB5E6081A01}" dt="2024-10-09T08:23:15.889" v="66" actId="47"/>
-        <pc:sldMkLst>
-          <pc:docMk/>
-          <pc:sldMk cId="1250198557" sldId="362"/>
-        </pc:sldMkLst>
-      </pc:sldChg>
-      <pc:sldChg chg="add del">
-        <pc:chgData name="Cooling, Chris" userId="6dcf99c9-2ba5-410a-8445-0893a3d1421f" providerId="ADAL" clId="{03CF33AC-D9E4-491F-8963-DAB5E6081A01}" dt="2024-10-09T08:23:15.889" v="66" actId="47"/>
-        <pc:sldMkLst>
-          <pc:docMk/>
-          <pc:sldMk cId="1454384184" sldId="363"/>
-        </pc:sldMkLst>
-      </pc:sldChg>
-      <pc:sldChg chg="modSp add mod modNotesTx">
-        <pc:chgData name="Cooling, Chris" userId="6dcf99c9-2ba5-410a-8445-0893a3d1421f" providerId="ADAL" clId="{03CF33AC-D9E4-491F-8963-DAB5E6081A01}" dt="2024-10-09T12:42:50.846" v="1693"/>
-        <pc:sldMkLst>
-          <pc:docMk/>
-          <pc:sldMk cId="3498346720" sldId="363"/>
-        </pc:sldMkLst>
-      </pc:sldChg>
-      <pc:sldChg chg="addSp modSp add mod modNotesTx">
-        <pc:chgData name="Cooling, Chris" userId="6dcf99c9-2ba5-410a-8445-0893a3d1421f" providerId="ADAL" clId="{03CF33AC-D9E4-491F-8963-DAB5E6081A01}" dt="2024-10-09T08:30:11.711" v="127" actId="1076"/>
-        <pc:sldMkLst>
-          <pc:docMk/>
-          <pc:sldMk cId="721571596" sldId="364"/>
-        </pc:sldMkLst>
-      </pc:sldChg>
-      <pc:sldChg chg="modSp add del mod">
-        <pc:chgData name="Cooling, Chris" userId="6dcf99c9-2ba5-410a-8445-0893a3d1421f" providerId="ADAL" clId="{03CF33AC-D9E4-491F-8963-DAB5E6081A01}" dt="2024-10-09T08:23:15.889" v="66" actId="47"/>
-        <pc:sldMkLst>
-          <pc:docMk/>
-          <pc:sldMk cId="3248724752" sldId="364"/>
-        </pc:sldMkLst>
-      </pc:sldChg>
-      <pc:sldChg chg="addSp delSp modSp add mod modNotesTx">
-        <pc:chgData name="Cooling, Chris" userId="6dcf99c9-2ba5-410a-8445-0893a3d1421f" providerId="ADAL" clId="{03CF33AC-D9E4-491F-8963-DAB5E6081A01}" dt="2024-10-09T08:31:43.076" v="140"/>
-        <pc:sldMkLst>
-          <pc:docMk/>
-          <pc:sldMk cId="1370984878" sldId="365"/>
-        </pc:sldMkLst>
-      </pc:sldChg>
-      <pc:sldChg chg="add del">
-        <pc:chgData name="Cooling, Chris" userId="6dcf99c9-2ba5-410a-8445-0893a3d1421f" providerId="ADAL" clId="{03CF33AC-D9E4-491F-8963-DAB5E6081A01}" dt="2024-10-09T08:29:41.131" v="122" actId="47"/>
-        <pc:sldMkLst>
-          <pc:docMk/>
-          <pc:sldMk cId="2092285345" sldId="365"/>
-        </pc:sldMkLst>
-      </pc:sldChg>
-      <pc:sldChg chg="add del">
-        <pc:chgData name="Cooling, Chris" userId="6dcf99c9-2ba5-410a-8445-0893a3d1421f" providerId="ADAL" clId="{03CF33AC-D9E4-491F-8963-DAB5E6081A01}" dt="2024-10-09T08:23:15.889" v="66" actId="47"/>
-        <pc:sldMkLst>
-          <pc:docMk/>
-          <pc:sldMk cId="3227858941" sldId="365"/>
-        </pc:sldMkLst>
-      </pc:sldChg>
-      <pc:sldChg chg="add del">
-        <pc:chgData name="Cooling, Chris" userId="6dcf99c9-2ba5-410a-8445-0893a3d1421f" providerId="ADAL" clId="{03CF33AC-D9E4-491F-8963-DAB5E6081A01}" dt="2024-10-09T08:23:15.889" v="66" actId="47"/>
-        <pc:sldMkLst>
-          <pc:docMk/>
-          <pc:sldMk cId="766773942" sldId="366"/>
-        </pc:sldMkLst>
-      </pc:sldChg>
-      <pc:sldChg chg="addSp delSp modSp add mod modNotesTx">
-        <pc:chgData name="Cooling, Chris" userId="6dcf99c9-2ba5-410a-8445-0893a3d1421f" providerId="ADAL" clId="{03CF33AC-D9E4-491F-8963-DAB5E6081A01}" dt="2024-10-09T08:43:00.265" v="182" actId="14100"/>
-        <pc:sldMkLst>
-          <pc:docMk/>
-          <pc:sldMk cId="2862336388" sldId="366"/>
-        </pc:sldMkLst>
-      </pc:sldChg>
-      <pc:sldChg chg="modSp add mod modNotesTx">
-        <pc:chgData name="Cooling, Chris" userId="6dcf99c9-2ba5-410a-8445-0893a3d1421f" providerId="ADAL" clId="{03CF33AC-D9E4-491F-8963-DAB5E6081A01}" dt="2024-10-09T08:42:45.098" v="181" actId="14100"/>
-        <pc:sldMkLst>
-          <pc:docMk/>
-          <pc:sldMk cId="49263487" sldId="367"/>
-        </pc:sldMkLst>
-      </pc:sldChg>
-      <pc:sldChg chg="add del">
-        <pc:chgData name="Cooling, Chris" userId="6dcf99c9-2ba5-410a-8445-0893a3d1421f" providerId="ADAL" clId="{03CF33AC-D9E4-491F-8963-DAB5E6081A01}" dt="2024-10-09T08:23:15.889" v="66" actId="47"/>
-        <pc:sldMkLst>
-          <pc:docMk/>
-          <pc:sldMk cId="812463129" sldId="367"/>
-        </pc:sldMkLst>
-      </pc:sldChg>
-      <pc:sldChg chg="add del">
-        <pc:chgData name="Cooling, Chris" userId="6dcf99c9-2ba5-410a-8445-0893a3d1421f" providerId="ADAL" clId="{03CF33AC-D9E4-491F-8963-DAB5E6081A01}" dt="2024-10-09T08:23:15.889" v="66" actId="47"/>
-        <pc:sldMkLst>
-          <pc:docMk/>
-          <pc:sldMk cId="735192102" sldId="368"/>
-        </pc:sldMkLst>
-      </pc:sldChg>
-      <pc:sldChg chg="addSp modSp add mod modNotesTx">
-        <pc:chgData name="Cooling, Chris" userId="6dcf99c9-2ba5-410a-8445-0893a3d1421f" providerId="ADAL" clId="{03CF33AC-D9E4-491F-8963-DAB5E6081A01}" dt="2024-10-09T08:42:38.126" v="180" actId="14100"/>
-        <pc:sldMkLst>
-          <pc:docMk/>
-          <pc:sldMk cId="3636830078" sldId="368"/>
-        </pc:sldMkLst>
-      </pc:sldChg>
-      <pc:sldChg chg="addSp delSp modSp add mod modNotesTx">
-        <pc:chgData name="Cooling, Chris" userId="6dcf99c9-2ba5-410a-8445-0893a3d1421f" providerId="ADAL" clId="{03CF33AC-D9E4-491F-8963-DAB5E6081A01}" dt="2024-10-09T08:49:02.679" v="916" actId="20577"/>
-        <pc:sldMkLst>
-          <pc:docMk/>
-          <pc:sldMk cId="1646575661" sldId="369"/>
-        </pc:sldMkLst>
-      </pc:sldChg>
-      <pc:sldChg chg="add del">
-        <pc:chgData name="Cooling, Chris" userId="6dcf99c9-2ba5-410a-8445-0893a3d1421f" providerId="ADAL" clId="{03CF33AC-D9E4-491F-8963-DAB5E6081A01}" dt="2024-10-09T08:23:15.889" v="66" actId="47"/>
-        <pc:sldMkLst>
-          <pc:docMk/>
-          <pc:sldMk cId="2428056926" sldId="369"/>
-        </pc:sldMkLst>
-      </pc:sldChg>
-      <pc:sldChg chg="addSp delSp modSp add mod modNotesTx">
-        <pc:chgData name="Cooling, Chris" userId="6dcf99c9-2ba5-410a-8445-0893a3d1421f" providerId="ADAL" clId="{03CF33AC-D9E4-491F-8963-DAB5E6081A01}" dt="2024-10-09T08:58:53.849" v="1261"/>
-        <pc:sldMkLst>
-          <pc:docMk/>
-          <pc:sldMk cId="919066874" sldId="370"/>
-        </pc:sldMkLst>
-      </pc:sldChg>
-      <pc:sldChg chg="add del">
-        <pc:chgData name="Cooling, Chris" userId="6dcf99c9-2ba5-410a-8445-0893a3d1421f" providerId="ADAL" clId="{03CF33AC-D9E4-491F-8963-DAB5E6081A01}" dt="2024-10-09T08:23:15.889" v="66" actId="47"/>
-        <pc:sldMkLst>
-          <pc:docMk/>
-          <pc:sldMk cId="3966698890" sldId="370"/>
-        </pc:sldMkLst>
-      </pc:sldChg>
-      <pc:sldChg chg="add del">
-        <pc:chgData name="Cooling, Chris" userId="6dcf99c9-2ba5-410a-8445-0893a3d1421f" providerId="ADAL" clId="{03CF33AC-D9E4-491F-8963-DAB5E6081A01}" dt="2024-10-09T08:23:15.889" v="66" actId="47"/>
-        <pc:sldMkLst>
-          <pc:docMk/>
-          <pc:sldMk cId="3168009626" sldId="371"/>
-        </pc:sldMkLst>
-      </pc:sldChg>
-      <pc:sldChg chg="modSp add mod modNotesTx">
-        <pc:chgData name="Cooling, Chris" userId="6dcf99c9-2ba5-410a-8445-0893a3d1421f" providerId="ADAL" clId="{03CF33AC-D9E4-491F-8963-DAB5E6081A01}" dt="2024-10-09T08:57:28.778" v="1256"/>
-        <pc:sldMkLst>
-          <pc:docMk/>
-          <pc:sldMk cId="3388074364" sldId="371"/>
-        </pc:sldMkLst>
-      </pc:sldChg>
-      <pc:sldChg chg="add del">
-        <pc:chgData name="Cooling, Chris" userId="6dcf99c9-2ba5-410a-8445-0893a3d1421f" providerId="ADAL" clId="{03CF33AC-D9E4-491F-8963-DAB5E6081A01}" dt="2024-10-09T08:23:15.889" v="66" actId="47"/>
-        <pc:sldMkLst>
-          <pc:docMk/>
-          <pc:sldMk cId="2053716256" sldId="372"/>
-        </pc:sldMkLst>
-      </pc:sldChg>
-      <pc:sldChg chg="addSp delSp modSp add mod modNotesTx">
-        <pc:chgData name="Cooling, Chris" userId="6dcf99c9-2ba5-410a-8445-0893a3d1421f" providerId="ADAL" clId="{03CF33AC-D9E4-491F-8963-DAB5E6081A01}" dt="2024-10-09T08:59:30.077" v="1267" actId="6549"/>
-        <pc:sldMkLst>
-          <pc:docMk/>
-          <pc:sldMk cId="2099201432" sldId="372"/>
-        </pc:sldMkLst>
-      </pc:sldChg>
-      <pc:sldChg chg="delSp modSp add mod modNotesTx">
-        <pc:chgData name="Cooling, Chris" userId="6dcf99c9-2ba5-410a-8445-0893a3d1421f" providerId="ADAL" clId="{03CF33AC-D9E4-491F-8963-DAB5E6081A01}" dt="2024-10-09T09:05:25.364" v="1283"/>
-        <pc:sldMkLst>
-          <pc:docMk/>
-          <pc:sldMk cId="1204830268" sldId="373"/>
-        </pc:sldMkLst>
-      </pc:sldChg>
-      <pc:sldChg chg="add del">
-        <pc:chgData name="Cooling, Chris" userId="6dcf99c9-2ba5-410a-8445-0893a3d1421f" providerId="ADAL" clId="{03CF33AC-D9E4-491F-8963-DAB5E6081A01}" dt="2024-10-09T08:23:15.889" v="66" actId="47"/>
-        <pc:sldMkLst>
-          <pc:docMk/>
-          <pc:sldMk cId="2958191099" sldId="373"/>
-        </pc:sldMkLst>
-      </pc:sldChg>
-      <pc:sldChg chg="add del">
-        <pc:chgData name="Cooling, Chris" userId="6dcf99c9-2ba5-410a-8445-0893a3d1421f" providerId="ADAL" clId="{03CF33AC-D9E4-491F-8963-DAB5E6081A01}" dt="2024-10-09T08:23:15.889" v="66" actId="47"/>
-        <pc:sldMkLst>
-          <pc:docMk/>
-          <pc:sldMk cId="746547034" sldId="374"/>
-        </pc:sldMkLst>
-      </pc:sldChg>
-      <pc:sldChg chg="modSp add mod modNotesTx">
-        <pc:chgData name="Cooling, Chris" userId="6dcf99c9-2ba5-410a-8445-0893a3d1421f" providerId="ADAL" clId="{03CF33AC-D9E4-491F-8963-DAB5E6081A01}" dt="2024-10-09T09:04:48.261" v="1282"/>
-        <pc:sldMkLst>
-          <pc:docMk/>
-          <pc:sldMk cId="1108594804" sldId="374"/>
-        </pc:sldMkLst>
-      </pc:sldChg>
-      <pc:sldChg chg="new del">
-        <pc:chgData name="Cooling, Chris" userId="6dcf99c9-2ba5-410a-8445-0893a3d1421f" providerId="ADAL" clId="{03CF33AC-D9E4-491F-8963-DAB5E6081A01}" dt="2024-10-09T09:01:09.430" v="1276" actId="2696"/>
-        <pc:sldMkLst>
-          <pc:docMk/>
-          <pc:sldMk cId="1777365485" sldId="374"/>
-        </pc:sldMkLst>
-      </pc:sldChg>
-      <pc:sldChg chg="addSp modSp add mod modNotesTx">
-        <pc:chgData name="Cooling, Chris" userId="6dcf99c9-2ba5-410a-8445-0893a3d1421f" providerId="ADAL" clId="{03CF33AC-D9E4-491F-8963-DAB5E6081A01}" dt="2024-10-09T13:03:34.764" v="2519" actId="20577"/>
-        <pc:sldMkLst>
-          <pc:docMk/>
-          <pc:sldMk cId="2224630467" sldId="375"/>
-        </pc:sldMkLst>
-      </pc:sldChg>
-      <pc:sldChg chg="modSp add del mod">
-        <pc:chgData name="Cooling, Chris" userId="6dcf99c9-2ba5-410a-8445-0893a3d1421f" providerId="ADAL" clId="{03CF33AC-D9E4-491F-8963-DAB5E6081A01}" dt="2024-10-09T08:23:15.889" v="66" actId="47"/>
-        <pc:sldMkLst>
-          <pc:docMk/>
-          <pc:sldMk cId="3140181227" sldId="375"/>
-        </pc:sldMkLst>
-      </pc:sldChg>
-      <pc:sldChg chg="add del">
-        <pc:chgData name="Cooling, Chris" userId="6dcf99c9-2ba5-410a-8445-0893a3d1421f" providerId="ADAL" clId="{03CF33AC-D9E4-491F-8963-DAB5E6081A01}" dt="2024-10-09T08:23:15.889" v="66" actId="47"/>
-        <pc:sldMkLst>
-          <pc:docMk/>
-          <pc:sldMk cId="2454815734" sldId="376"/>
-        </pc:sldMkLst>
-      </pc:sldChg>
-      <pc:sldChg chg="addSp delSp modSp add mod modNotesTx">
-        <pc:chgData name="Cooling, Chris" userId="6dcf99c9-2ba5-410a-8445-0893a3d1421f" providerId="ADAL" clId="{03CF33AC-D9E4-491F-8963-DAB5E6081A01}" dt="2024-10-09T13:04:02.494" v="2567" actId="20577"/>
-        <pc:sldMkLst>
-          <pc:docMk/>
-          <pc:sldMk cId="3847659151" sldId="376"/>
-        </pc:sldMkLst>
-      </pc:sldChg>
-      <pc:sldChg chg="addSp delSp modSp add mod ord modNotesTx">
-        <pc:chgData name="Cooling, Chris" userId="6dcf99c9-2ba5-410a-8445-0893a3d1421f" providerId="ADAL" clId="{03CF33AC-D9E4-491F-8963-DAB5E6081A01}" dt="2024-10-09T13:09:12.741" v="2832" actId="20577"/>
-        <pc:sldMkLst>
-          <pc:docMk/>
-          <pc:sldMk cId="2673447316" sldId="377"/>
-        </pc:sldMkLst>
-      </pc:sldChg>
-      <pc:sldChg chg="modSp add del mod">
-        <pc:chgData name="Cooling, Chris" userId="6dcf99c9-2ba5-410a-8445-0893a3d1421f" providerId="ADAL" clId="{03CF33AC-D9E4-491F-8963-DAB5E6081A01}" dt="2024-10-09T08:23:15.889" v="66" actId="47"/>
-        <pc:sldMkLst>
-          <pc:docMk/>
-          <pc:sldMk cId="2849987525" sldId="377"/>
-        </pc:sldMkLst>
-      </pc:sldChg>
-      <pc:sldChg chg="add del">
-        <pc:chgData name="Cooling, Chris" userId="6dcf99c9-2ba5-410a-8445-0893a3d1421f" providerId="ADAL" clId="{03CF33AC-D9E4-491F-8963-DAB5E6081A01}" dt="2024-10-09T08:23:15.889" v="66" actId="47"/>
-        <pc:sldMkLst>
-          <pc:docMk/>
-          <pc:sldMk cId="3102632955" sldId="378"/>
-        </pc:sldMkLst>
-      </pc:sldChg>
-      <pc:sldChg chg="addSp delSp modSp add mod modNotesTx">
-        <pc:chgData name="Cooling, Chris" userId="6dcf99c9-2ba5-410a-8445-0893a3d1421f" providerId="ADAL" clId="{03CF33AC-D9E4-491F-8963-DAB5E6081A01}" dt="2024-10-09T13:10:48.793" v="2858" actId="20577"/>
-        <pc:sldMkLst>
-          <pc:docMk/>
-          <pc:sldMk cId="3995649870" sldId="378"/>
-        </pc:sldMkLst>
-      </pc:sldChg>
-      <pc:sldChg chg="addSp delSp modSp add mod modNotesTx">
-        <pc:chgData name="Cooling, Chris" userId="6dcf99c9-2ba5-410a-8445-0893a3d1421f" providerId="ADAL" clId="{03CF33AC-D9E4-491F-8963-DAB5E6081A01}" dt="2024-10-09T09:22:04.273" v="1354"/>
-        <pc:sldMkLst>
-          <pc:docMk/>
-          <pc:sldMk cId="606499370" sldId="379"/>
-        </pc:sldMkLst>
-      </pc:sldChg>
-      <pc:sldChg chg="add del">
-        <pc:chgData name="Cooling, Chris" userId="6dcf99c9-2ba5-410a-8445-0893a3d1421f" providerId="ADAL" clId="{03CF33AC-D9E4-491F-8963-DAB5E6081A01}" dt="2024-10-09T08:23:15.889" v="66" actId="47"/>
-        <pc:sldMkLst>
-          <pc:docMk/>
-          <pc:sldMk cId="3778418652" sldId="379"/>
-        </pc:sldMkLst>
-      </pc:sldChg>
-      <pc:sldChg chg="addSp delSp modSp add mod modNotesTx">
-        <pc:chgData name="Cooling, Chris" userId="6dcf99c9-2ba5-410a-8445-0893a3d1421f" providerId="ADAL" clId="{03CF33AC-D9E4-491F-8963-DAB5E6081A01}" dt="2024-10-09T13:13:04.394" v="2917" actId="20577"/>
-        <pc:sldMkLst>
-          <pc:docMk/>
-          <pc:sldMk cId="534930278" sldId="380"/>
-        </pc:sldMkLst>
-      </pc:sldChg>
-      <pc:sldChg chg="add del">
-        <pc:chgData name="Cooling, Chris" userId="6dcf99c9-2ba5-410a-8445-0893a3d1421f" providerId="ADAL" clId="{03CF33AC-D9E4-491F-8963-DAB5E6081A01}" dt="2024-10-09T08:23:15.889" v="66" actId="47"/>
-        <pc:sldMkLst>
-          <pc:docMk/>
-          <pc:sldMk cId="2599389758" sldId="380"/>
-        </pc:sldMkLst>
-      </pc:sldChg>
-      <pc:sldChg chg="addSp delSp modSp add mod modNotesTx">
-        <pc:chgData name="Cooling, Chris" userId="6dcf99c9-2ba5-410a-8445-0893a3d1421f" providerId="ADAL" clId="{03CF33AC-D9E4-491F-8963-DAB5E6081A01}" dt="2024-10-09T13:13:45.608" v="2938" actId="20577"/>
-        <pc:sldMkLst>
-          <pc:docMk/>
-          <pc:sldMk cId="2605189886" sldId="381"/>
-        </pc:sldMkLst>
-      </pc:sldChg>
-      <pc:sldChg chg="add del">
-        <pc:chgData name="Cooling, Chris" userId="6dcf99c9-2ba5-410a-8445-0893a3d1421f" providerId="ADAL" clId="{03CF33AC-D9E4-491F-8963-DAB5E6081A01}" dt="2024-10-09T08:23:15.889" v="66" actId="47"/>
-        <pc:sldMkLst>
-          <pc:docMk/>
-          <pc:sldMk cId="2798413230" sldId="381"/>
-        </pc:sldMkLst>
-      </pc:sldChg>
-      <pc:sldChg chg="modSp add del mod">
-        <pc:chgData name="Cooling, Chris" userId="6dcf99c9-2ba5-410a-8445-0893a3d1421f" providerId="ADAL" clId="{03CF33AC-D9E4-491F-8963-DAB5E6081A01}" dt="2024-10-09T08:23:15.889" v="66" actId="47"/>
-        <pc:sldMkLst>
-          <pc:docMk/>
-          <pc:sldMk cId="3357951532" sldId="382"/>
-        </pc:sldMkLst>
-      </pc:sldChg>
-      <pc:sldChg chg="delSp modSp add mod modNotesTx">
-        <pc:chgData name="Cooling, Chris" userId="6dcf99c9-2ba5-410a-8445-0893a3d1421f" providerId="ADAL" clId="{03CF33AC-D9E4-491F-8963-DAB5E6081A01}" dt="2024-10-09T09:35:08.883" v="1424" actId="20577"/>
-        <pc:sldMkLst>
-          <pc:docMk/>
-          <pc:sldMk cId="3637714125" sldId="382"/>
-        </pc:sldMkLst>
-      </pc:sldChg>
-      <pc:sldChg chg="add del">
-        <pc:chgData name="Cooling, Chris" userId="6dcf99c9-2ba5-410a-8445-0893a3d1421f" providerId="ADAL" clId="{03CF33AC-D9E4-491F-8963-DAB5E6081A01}" dt="2024-10-09T08:23:15.889" v="66" actId="47"/>
-        <pc:sldMkLst>
-          <pc:docMk/>
-          <pc:sldMk cId="453738133" sldId="383"/>
-        </pc:sldMkLst>
-      </pc:sldChg>
-      <pc:sldChg chg="modSp add mod modNotesTx">
-        <pc:chgData name="Cooling, Chris" userId="6dcf99c9-2ba5-410a-8445-0893a3d1421f" providerId="ADAL" clId="{03CF33AC-D9E4-491F-8963-DAB5E6081A01}" dt="2024-10-09T09:37:24.718" v="1436"/>
-        <pc:sldMkLst>
-          <pc:docMk/>
-          <pc:sldMk cId="1793681033" sldId="383"/>
-        </pc:sldMkLst>
-      </pc:sldChg>
-      <pc:sldChg chg="add del">
-        <pc:chgData name="Cooling, Chris" userId="6dcf99c9-2ba5-410a-8445-0893a3d1421f" providerId="ADAL" clId="{03CF33AC-D9E4-491F-8963-DAB5E6081A01}" dt="2024-10-09T08:23:15.889" v="66" actId="47"/>
-        <pc:sldMkLst>
-          <pc:docMk/>
-          <pc:sldMk cId="57580663" sldId="384"/>
-        </pc:sldMkLst>
-      </pc:sldChg>
-      <pc:sldChg chg="addSp modSp add mod modNotesTx">
-        <pc:chgData name="Cooling, Chris" userId="6dcf99c9-2ba5-410a-8445-0893a3d1421f" providerId="ADAL" clId="{03CF33AC-D9E4-491F-8963-DAB5E6081A01}" dt="2024-10-09T13:15:06.706" v="2993" actId="20577"/>
-        <pc:sldMkLst>
-          <pc:docMk/>
-          <pc:sldMk cId="170370874" sldId="384"/>
-        </pc:sldMkLst>
-      </pc:sldChg>
-      <pc:sldChg chg="add del">
-        <pc:chgData name="Cooling, Chris" userId="6dcf99c9-2ba5-410a-8445-0893a3d1421f" providerId="ADAL" clId="{03CF33AC-D9E4-491F-8963-DAB5E6081A01}" dt="2024-10-09T08:23:15.889" v="66" actId="47"/>
-        <pc:sldMkLst>
-          <pc:docMk/>
-          <pc:sldMk cId="2487598261" sldId="385"/>
-        </pc:sldMkLst>
-      </pc:sldChg>
-      <pc:sldChg chg="addSp modSp add mod modNotesTx">
-        <pc:chgData name="Cooling, Chris" userId="6dcf99c9-2ba5-410a-8445-0893a3d1421f" providerId="ADAL" clId="{03CF33AC-D9E4-491F-8963-DAB5E6081A01}" dt="2024-10-09T13:15:40.487" v="3006" actId="33524"/>
-        <pc:sldMkLst>
-          <pc:docMk/>
-          <pc:sldMk cId="3374749885" sldId="385"/>
-        </pc:sldMkLst>
-      </pc:sldChg>
-      <pc:sldChg chg="modSp add del mod">
-        <pc:chgData name="Cooling, Chris" userId="6dcf99c9-2ba5-410a-8445-0893a3d1421f" providerId="ADAL" clId="{03CF33AC-D9E4-491F-8963-DAB5E6081A01}" dt="2024-10-09T08:23:15.889" v="66" actId="47"/>
-        <pc:sldMkLst>
-          <pc:docMk/>
-          <pc:sldMk cId="3173781080" sldId="386"/>
-        </pc:sldMkLst>
-      </pc:sldChg>
-      <pc:sldChg chg="delSp modSp add mod modNotesTx">
-        <pc:chgData name="Cooling, Chris" userId="6dcf99c9-2ba5-410a-8445-0893a3d1421f" providerId="ADAL" clId="{03CF33AC-D9E4-491F-8963-DAB5E6081A01}" dt="2024-10-09T13:16:33.468" v="3050" actId="478"/>
-        <pc:sldMkLst>
-          <pc:docMk/>
-          <pc:sldMk cId="3981322899" sldId="386"/>
-        </pc:sldMkLst>
-      </pc:sldChg>
-      <pc:sldChg chg="modSp add del mod">
-        <pc:chgData name="Cooling, Chris" userId="6dcf99c9-2ba5-410a-8445-0893a3d1421f" providerId="ADAL" clId="{03CF33AC-D9E4-491F-8963-DAB5E6081A01}" dt="2024-10-09T08:23:15.889" v="66" actId="47"/>
-        <pc:sldMkLst>
-          <pc:docMk/>
-          <pc:sldMk cId="1390760873" sldId="387"/>
-        </pc:sldMkLst>
-      </pc:sldChg>
-      <pc:sldChg chg="addSp modSp add mod modNotesTx">
-        <pc:chgData name="Cooling, Chris" userId="6dcf99c9-2ba5-410a-8445-0893a3d1421f" providerId="ADAL" clId="{03CF33AC-D9E4-491F-8963-DAB5E6081A01}" dt="2024-10-09T13:17:06.658" v="3109" actId="20577"/>
-        <pc:sldMkLst>
-          <pc:docMk/>
-          <pc:sldMk cId="2197734974" sldId="387"/>
-        </pc:sldMkLst>
-      </pc:sldChg>
-      <pc:sldChg chg="delSp modSp add mod modNotesTx">
-        <pc:chgData name="Cooling, Chris" userId="6dcf99c9-2ba5-410a-8445-0893a3d1421f" providerId="ADAL" clId="{03CF33AC-D9E4-491F-8963-DAB5E6081A01}" dt="2024-10-09T09:49:11.307" v="1482" actId="478"/>
-        <pc:sldMkLst>
-          <pc:docMk/>
-          <pc:sldMk cId="3191437002" sldId="388"/>
-        </pc:sldMkLst>
-      </pc:sldChg>
-      <pc:sldChg chg="add del">
-        <pc:chgData name="Cooling, Chris" userId="6dcf99c9-2ba5-410a-8445-0893a3d1421f" providerId="ADAL" clId="{03CF33AC-D9E4-491F-8963-DAB5E6081A01}" dt="2024-10-09T08:23:15.889" v="66" actId="47"/>
-        <pc:sldMkLst>
-          <pc:docMk/>
-          <pc:sldMk cId="3749303348" sldId="388"/>
-        </pc:sldMkLst>
-      </pc:sldChg>
-      <pc:sldChg chg="add del">
-        <pc:chgData name="Cooling, Chris" userId="6dcf99c9-2ba5-410a-8445-0893a3d1421f" providerId="ADAL" clId="{03CF33AC-D9E4-491F-8963-DAB5E6081A01}" dt="2024-10-09T08:23:15.889" v="66" actId="47"/>
-        <pc:sldMkLst>
-          <pc:docMk/>
-          <pc:sldMk cId="933885824" sldId="389"/>
-        </pc:sldMkLst>
-      </pc:sldChg>
-      <pc:sldChg chg="addSp delSp modSp add mod ord modNotesTx">
-        <pc:chgData name="Cooling, Chris" userId="6dcf99c9-2ba5-410a-8445-0893a3d1421f" providerId="ADAL" clId="{03CF33AC-D9E4-491F-8963-DAB5E6081A01}" dt="2024-10-09T13:23:17.221" v="3126" actId="20577"/>
-        <pc:sldMkLst>
-          <pc:docMk/>
-          <pc:sldMk cId="3717795031" sldId="389"/>
-        </pc:sldMkLst>
-      </pc:sldChg>
-      <pc:sldChg chg="add del">
-        <pc:chgData name="Cooling, Chris" userId="6dcf99c9-2ba5-410a-8445-0893a3d1421f" providerId="ADAL" clId="{03CF33AC-D9E4-491F-8963-DAB5E6081A01}" dt="2024-10-09T08:23:15.889" v="66" actId="47"/>
-        <pc:sldMkLst>
-          <pc:docMk/>
-          <pc:sldMk cId="1654254681" sldId="390"/>
-        </pc:sldMkLst>
-      </pc:sldChg>
-      <pc:sldChg chg="addSp delSp modSp add mod modNotesTx">
-        <pc:chgData name="Cooling, Chris" userId="6dcf99c9-2ba5-410a-8445-0893a3d1421f" providerId="ADAL" clId="{03CF33AC-D9E4-491F-8963-DAB5E6081A01}" dt="2024-10-09T13:24:16.791" v="3180" actId="20577"/>
-        <pc:sldMkLst>
-          <pc:docMk/>
-          <pc:sldMk cId="2876155974" sldId="390"/>
-        </pc:sldMkLst>
-      </pc:sldChg>
-      <pc:sldChg chg="add del">
-        <pc:chgData name="Cooling, Chris" userId="6dcf99c9-2ba5-410a-8445-0893a3d1421f" providerId="ADAL" clId="{03CF33AC-D9E4-491F-8963-DAB5E6081A01}" dt="2024-10-09T08:23:15.889" v="66" actId="47"/>
-        <pc:sldMkLst>
-          <pc:docMk/>
-          <pc:sldMk cId="2312507278" sldId="391"/>
-        </pc:sldMkLst>
-      </pc:sldChg>
-      <pc:sldChg chg="delSp modSp add mod modNotesTx">
-        <pc:chgData name="Cooling, Chris" userId="6dcf99c9-2ba5-410a-8445-0893a3d1421f" providerId="ADAL" clId="{03CF33AC-D9E4-491F-8963-DAB5E6081A01}" dt="2024-10-09T09:55:58.085" v="1520" actId="20577"/>
-        <pc:sldMkLst>
-          <pc:docMk/>
-          <pc:sldMk cId="3530089354" sldId="391"/>
-        </pc:sldMkLst>
-      </pc:sldChg>
-      <pc:sldChg chg="modSp add del mod">
-        <pc:chgData name="Cooling, Chris" userId="6dcf99c9-2ba5-410a-8445-0893a3d1421f" providerId="ADAL" clId="{03CF33AC-D9E4-491F-8963-DAB5E6081A01}" dt="2024-10-09T08:23:15.889" v="66" actId="47"/>
-        <pc:sldMkLst>
-          <pc:docMk/>
-          <pc:sldMk cId="2539671263" sldId="392"/>
-        </pc:sldMkLst>
-      </pc:sldChg>
-      <pc:sldChg chg="modSp add mod modNotesTx">
-        <pc:chgData name="Cooling, Chris" userId="6dcf99c9-2ba5-410a-8445-0893a3d1421f" providerId="ADAL" clId="{03CF33AC-D9E4-491F-8963-DAB5E6081A01}" dt="2024-10-09T09:56:53.580" v="1526"/>
-        <pc:sldMkLst>
-          <pc:docMk/>
-          <pc:sldMk cId="3446637373" sldId="392"/>
-        </pc:sldMkLst>
-      </pc:sldChg>
-      <pc:sldChg chg="addSp modSp add mod modNotesTx">
-        <pc:chgData name="Cooling, Chris" userId="6dcf99c9-2ba5-410a-8445-0893a3d1421f" providerId="ADAL" clId="{03CF33AC-D9E4-491F-8963-DAB5E6081A01}" dt="2024-10-09T10:00:18.203" v="1538"/>
-        <pc:sldMkLst>
-          <pc:docMk/>
-          <pc:sldMk cId="620213683" sldId="393"/>
-        </pc:sldMkLst>
-      </pc:sldChg>
-      <pc:sldChg chg="add del">
-        <pc:chgData name="Cooling, Chris" userId="6dcf99c9-2ba5-410a-8445-0893a3d1421f" providerId="ADAL" clId="{03CF33AC-D9E4-491F-8963-DAB5E6081A01}" dt="2024-10-09T08:23:15.889" v="66" actId="47"/>
-        <pc:sldMkLst>
-          <pc:docMk/>
-          <pc:sldMk cId="3744006074" sldId="393"/>
-        </pc:sldMkLst>
-      </pc:sldChg>
-      <pc:sldChg chg="add del">
-        <pc:chgData name="Cooling, Chris" userId="6dcf99c9-2ba5-410a-8445-0893a3d1421f" providerId="ADAL" clId="{03CF33AC-D9E4-491F-8963-DAB5E6081A01}" dt="2024-10-09T08:23:15.889" v="66" actId="47"/>
-        <pc:sldMkLst>
-          <pc:docMk/>
-          <pc:sldMk cId="1378110722" sldId="394"/>
-        </pc:sldMkLst>
-      </pc:sldChg>
-      <pc:sldChg chg="addSp delSp modSp add mod modNotesTx">
-        <pc:chgData name="Cooling, Chris" userId="6dcf99c9-2ba5-410a-8445-0893a3d1421f" providerId="ADAL" clId="{03CF33AC-D9E4-491F-8963-DAB5E6081A01}" dt="2024-10-09T13:25:26.979" v="3256" actId="20577"/>
-        <pc:sldMkLst>
-          <pc:docMk/>
-          <pc:sldMk cId="2690902426" sldId="394"/>
-        </pc:sldMkLst>
-      </pc:sldChg>
-      <pc:sldChg chg="addSp delSp modSp add mod modNotesTx">
-        <pc:chgData name="Cooling, Chris" userId="6dcf99c9-2ba5-410a-8445-0893a3d1421f" providerId="ADAL" clId="{03CF33AC-D9E4-491F-8963-DAB5E6081A01}" dt="2024-10-09T10:15:49.750" v="1568"/>
-        <pc:sldMkLst>
-          <pc:docMk/>
-          <pc:sldMk cId="3761449199" sldId="395"/>
-        </pc:sldMkLst>
-      </pc:sldChg>
-      <pc:sldChg chg="add del">
-        <pc:chgData name="Cooling, Chris" userId="6dcf99c9-2ba5-410a-8445-0893a3d1421f" providerId="ADAL" clId="{03CF33AC-D9E4-491F-8963-DAB5E6081A01}" dt="2024-10-09T08:23:15.889" v="66" actId="47"/>
-        <pc:sldMkLst>
-          <pc:docMk/>
-          <pc:sldMk cId="3968020684" sldId="395"/>
-        </pc:sldMkLst>
-      </pc:sldChg>
-      <pc:sldChg chg="add del">
-        <pc:chgData name="Cooling, Chris" userId="6dcf99c9-2ba5-410a-8445-0893a3d1421f" providerId="ADAL" clId="{03CF33AC-D9E4-491F-8963-DAB5E6081A01}" dt="2024-10-09T08:23:15.889" v="66" actId="47"/>
-        <pc:sldMkLst>
-          <pc:docMk/>
-          <pc:sldMk cId="3897677485" sldId="396"/>
-        </pc:sldMkLst>
-      </pc:sldChg>
-      <pc:sldChg chg="addSp delSp modSp add mod modNotesTx">
-        <pc:chgData name="Cooling, Chris" userId="6dcf99c9-2ba5-410a-8445-0893a3d1421f" providerId="ADAL" clId="{03CF33AC-D9E4-491F-8963-DAB5E6081A01}" dt="2024-10-09T10:17:23.395" v="1578"/>
-        <pc:sldMkLst>
-          <pc:docMk/>
-          <pc:sldMk cId="4103524331" sldId="396"/>
-        </pc:sldMkLst>
-      </pc:sldChg>
-      <pc:sldChg chg="addSp delSp modSp add mod modNotesTx">
-        <pc:chgData name="Cooling, Chris" userId="6dcf99c9-2ba5-410a-8445-0893a3d1421f" providerId="ADAL" clId="{03CF33AC-D9E4-491F-8963-DAB5E6081A01}" dt="2024-10-09T13:27:00.884" v="3315" actId="20577"/>
-        <pc:sldMkLst>
-          <pc:docMk/>
-          <pc:sldMk cId="719251142" sldId="397"/>
-        </pc:sldMkLst>
-      </pc:sldChg>
-      <pc:sldChg chg="add del">
-        <pc:chgData name="Cooling, Chris" userId="6dcf99c9-2ba5-410a-8445-0893a3d1421f" providerId="ADAL" clId="{03CF33AC-D9E4-491F-8963-DAB5E6081A01}" dt="2024-10-09T08:23:15.889" v="66" actId="47"/>
-        <pc:sldMkLst>
-          <pc:docMk/>
-          <pc:sldMk cId="2040837939" sldId="397"/>
-        </pc:sldMkLst>
-      </pc:sldChg>
-      <pc:sldChg chg="add del">
-        <pc:chgData name="Cooling, Chris" userId="6dcf99c9-2ba5-410a-8445-0893a3d1421f" providerId="ADAL" clId="{03CF33AC-D9E4-491F-8963-DAB5E6081A01}" dt="2024-10-09T08:23:15.889" v="66" actId="47"/>
-        <pc:sldMkLst>
-          <pc:docMk/>
-          <pc:sldMk cId="813487936" sldId="398"/>
-        </pc:sldMkLst>
-      </pc:sldChg>
-      <pc:sldChg chg="delSp modSp add mod modNotesTx">
-        <pc:chgData name="Cooling, Chris" userId="6dcf99c9-2ba5-410a-8445-0893a3d1421f" providerId="ADAL" clId="{03CF33AC-D9E4-491F-8963-DAB5E6081A01}" dt="2024-10-09T13:27:28.173" v="3335" actId="20577"/>
-        <pc:sldMkLst>
-          <pc:docMk/>
-          <pc:sldMk cId="3921319063" sldId="398"/>
-        </pc:sldMkLst>
-      </pc:sldChg>
-      <pc:sldChg chg="modSp add mod modNotesTx">
-        <pc:chgData name="Cooling, Chris" userId="6dcf99c9-2ba5-410a-8445-0893a3d1421f" providerId="ADAL" clId="{03CF33AC-D9E4-491F-8963-DAB5E6081A01}" dt="2024-10-09T13:28:06.093" v="3368" actId="20577"/>
-        <pc:sldMkLst>
-          <pc:docMk/>
-          <pc:sldMk cId="3172791869" sldId="399"/>
-        </pc:sldMkLst>
-      </pc:sldChg>
-      <pc:sldChg chg="add del">
-        <pc:chgData name="Cooling, Chris" userId="6dcf99c9-2ba5-410a-8445-0893a3d1421f" providerId="ADAL" clId="{03CF33AC-D9E4-491F-8963-DAB5E6081A01}" dt="2024-10-09T08:23:15.889" v="66" actId="47"/>
-        <pc:sldMkLst>
-          <pc:docMk/>
-          <pc:sldMk cId="3835658580" sldId="399"/>
-        </pc:sldMkLst>
-      </pc:sldChg>
-      <pc:sldChg chg="add del">
-        <pc:chgData name="Cooling, Chris" userId="6dcf99c9-2ba5-410a-8445-0893a3d1421f" providerId="ADAL" clId="{03CF33AC-D9E4-491F-8963-DAB5E6081A01}" dt="2024-10-09T08:23:15.889" v="66" actId="47"/>
-        <pc:sldMkLst>
-          <pc:docMk/>
-          <pc:sldMk cId="200963720" sldId="400"/>
-        </pc:sldMkLst>
-      </pc:sldChg>
-      <pc:sldChg chg="addSp delSp modSp add mod modNotesTx">
-        <pc:chgData name="Cooling, Chris" userId="6dcf99c9-2ba5-410a-8445-0893a3d1421f" providerId="ADAL" clId="{03CF33AC-D9E4-491F-8963-DAB5E6081A01}" dt="2024-10-09T13:28:20.633" v="3369" actId="20577"/>
-        <pc:sldMkLst>
-          <pc:docMk/>
-          <pc:sldMk cId="1135729167" sldId="400"/>
-        </pc:sldMkLst>
-      </pc:sldChg>
-      <pc:sldChg chg="addSp delSp modSp add mod modNotesTx">
-        <pc:chgData name="Cooling, Chris" userId="6dcf99c9-2ba5-410a-8445-0893a3d1421f" providerId="ADAL" clId="{03CF33AC-D9E4-491F-8963-DAB5E6081A01}" dt="2024-10-09T13:29:10.393" v="3444"/>
-        <pc:sldMkLst>
-          <pc:docMk/>
-          <pc:sldMk cId="737553104" sldId="401"/>
-        </pc:sldMkLst>
-      </pc:sldChg>
-      <pc:sldChg chg="add del">
-        <pc:chgData name="Cooling, Chris" userId="6dcf99c9-2ba5-410a-8445-0893a3d1421f" providerId="ADAL" clId="{03CF33AC-D9E4-491F-8963-DAB5E6081A01}" dt="2024-10-09T08:23:15.889" v="66" actId="47"/>
-        <pc:sldMkLst>
-          <pc:docMk/>
-          <pc:sldMk cId="3162482540" sldId="401"/>
-        </pc:sldMkLst>
-      </pc:sldChg>
-      <pc:sldChg chg="add del">
-        <pc:chgData name="Cooling, Chris" userId="6dcf99c9-2ba5-410a-8445-0893a3d1421f" providerId="ADAL" clId="{03CF33AC-D9E4-491F-8963-DAB5E6081A01}" dt="2024-10-09T08:23:15.889" v="66" actId="47"/>
-        <pc:sldMkLst>
-          <pc:docMk/>
-          <pc:sldMk cId="265627358" sldId="402"/>
-        </pc:sldMkLst>
-      </pc:sldChg>
-      <pc:sldChg chg="addSp delSp modSp add mod modNotesTx">
-        <pc:chgData name="Cooling, Chris" userId="6dcf99c9-2ba5-410a-8445-0893a3d1421f" providerId="ADAL" clId="{03CF33AC-D9E4-491F-8963-DAB5E6081A01}" dt="2024-10-09T13:29:25.192" v="3482" actId="20577"/>
-        <pc:sldMkLst>
-          <pc:docMk/>
-          <pc:sldMk cId="4021068231" sldId="402"/>
-        </pc:sldMkLst>
-      </pc:sldChg>
-      <pc:sldChg chg="addSp delSp modSp add mod modNotesTx">
-        <pc:chgData name="Cooling, Chris" userId="6dcf99c9-2ba5-410a-8445-0893a3d1421f" providerId="ADAL" clId="{03CF33AC-D9E4-491F-8963-DAB5E6081A01}" dt="2024-10-09T13:30:57.286" v="3600" actId="20577"/>
-        <pc:sldMkLst>
-          <pc:docMk/>
-          <pc:sldMk cId="2500301249" sldId="403"/>
-        </pc:sldMkLst>
-      </pc:sldChg>
-      <pc:sldChg chg="add del">
-        <pc:chgData name="Cooling, Chris" userId="6dcf99c9-2ba5-410a-8445-0893a3d1421f" providerId="ADAL" clId="{03CF33AC-D9E4-491F-8963-DAB5E6081A01}" dt="2024-10-09T08:23:15.889" v="66" actId="47"/>
-        <pc:sldMkLst>
-          <pc:docMk/>
-          <pc:sldMk cId="3716300829" sldId="403"/>
-        </pc:sldMkLst>
-      </pc:sldChg>
-      <pc:sldChg chg="delSp modSp add mod modNotesTx">
-        <pc:chgData name="Cooling, Chris" userId="6dcf99c9-2ba5-410a-8445-0893a3d1421f" providerId="ADAL" clId="{03CF33AC-D9E4-491F-8963-DAB5E6081A01}" dt="2024-10-09T13:31:44.605" v="3695" actId="20577"/>
-        <pc:sldMkLst>
-          <pc:docMk/>
-          <pc:sldMk cId="1407877688" sldId="404"/>
-        </pc:sldMkLst>
-      </pc:sldChg>
-      <pc:sldChg chg="add del">
-        <pc:chgData name="Cooling, Chris" userId="6dcf99c9-2ba5-410a-8445-0893a3d1421f" providerId="ADAL" clId="{03CF33AC-D9E4-491F-8963-DAB5E6081A01}" dt="2024-10-09T08:23:15.889" v="66" actId="47"/>
-        <pc:sldMkLst>
-          <pc:docMk/>
-          <pc:sldMk cId="1971978791" sldId="404"/>
-        </pc:sldMkLst>
-      </pc:sldChg>
-      <pc:sldChg chg="addSp delSp modSp add mod modNotesTx">
-        <pc:chgData name="Cooling, Chris" userId="6dcf99c9-2ba5-410a-8445-0893a3d1421f" providerId="ADAL" clId="{03CF33AC-D9E4-491F-8963-DAB5E6081A01}" dt="2024-10-09T13:12:34.409" v="2863" actId="20577"/>
-        <pc:sldMkLst>
-          <pc:docMk/>
-          <pc:sldMk cId="1607320822" sldId="405"/>
-        </pc:sldMkLst>
-      </pc:sldChg>
-      <pc:sldChg chg="add del">
-        <pc:chgData name="Cooling, Chris" userId="6dcf99c9-2ba5-410a-8445-0893a3d1421f" providerId="ADAL" clId="{03CF33AC-D9E4-491F-8963-DAB5E6081A01}" dt="2024-10-09T08:23:15.889" v="66" actId="47"/>
-        <pc:sldMkLst>
-          <pc:docMk/>
-          <pc:sldMk cId="2646455873" sldId="405"/>
-        </pc:sldMkLst>
-      </pc:sldChg>
-      <pc:sldChg chg="add del">
-        <pc:chgData name="Cooling, Chris" userId="6dcf99c9-2ba5-410a-8445-0893a3d1421f" providerId="ADAL" clId="{03CF33AC-D9E4-491F-8963-DAB5E6081A01}" dt="2024-10-09T08:23:15.889" v="66" actId="47"/>
-        <pc:sldMkLst>
-          <pc:docMk/>
-          <pc:sldMk cId="721358061" sldId="406"/>
-        </pc:sldMkLst>
-      </pc:sldChg>
-      <pc:sldChg chg="add modNotesTx">
-        <pc:chgData name="Cooling, Chris" userId="6dcf99c9-2ba5-410a-8445-0893a3d1421f" providerId="ADAL" clId="{03CF33AC-D9E4-491F-8963-DAB5E6081A01}" dt="2024-10-11T11:01:46.006" v="3749" actId="20577"/>
-        <pc:sldMkLst>
-          <pc:docMk/>
-          <pc:sldMk cId="3543295302" sldId="406"/>
-        </pc:sldMkLst>
-      </pc:sldChg>
-      <pc:sldChg chg="add del">
-        <pc:chgData name="Cooling, Chris" userId="6dcf99c9-2ba5-410a-8445-0893a3d1421f" providerId="ADAL" clId="{03CF33AC-D9E4-491F-8963-DAB5E6081A01}" dt="2024-10-09T08:23:15.889" v="66" actId="47"/>
-        <pc:sldMkLst>
-          <pc:docMk/>
-          <pc:sldMk cId="2899337003" sldId="407"/>
-        </pc:sldMkLst>
-      </pc:sldChg>
-      <pc:sldChg chg="delSp modSp add mod">
-        <pc:chgData name="Cooling, Chris" userId="6dcf99c9-2ba5-410a-8445-0893a3d1421f" providerId="ADAL" clId="{03CF33AC-D9E4-491F-8963-DAB5E6081A01}" dt="2024-10-16T09:09:29.452" v="4301" actId="20577"/>
-        <pc:sldMkLst>
-          <pc:docMk/>
-          <pc:sldMk cId="4288594215" sldId="407"/>
-        </pc:sldMkLst>
-      </pc:sldChg>
-      <pc:sldChg chg="add del">
-        <pc:chgData name="Cooling, Chris" userId="6dcf99c9-2ba5-410a-8445-0893a3d1421f" providerId="ADAL" clId="{03CF33AC-D9E4-491F-8963-DAB5E6081A01}" dt="2024-10-09T08:23:15.889" v="66" actId="47"/>
-        <pc:sldMkLst>
-          <pc:docMk/>
-          <pc:sldMk cId="3099411356" sldId="408"/>
-        </pc:sldMkLst>
-      </pc:sldChg>
-      <pc:sldChg chg="add del">
-        <pc:chgData name="Cooling, Chris" userId="6dcf99c9-2ba5-410a-8445-0893a3d1421f" providerId="ADAL" clId="{03CF33AC-D9E4-491F-8963-DAB5E6081A01}" dt="2024-10-09T08:23:15.889" v="66" actId="47"/>
-        <pc:sldMkLst>
-          <pc:docMk/>
-          <pc:sldMk cId="1839592679" sldId="409"/>
-        </pc:sldMkLst>
-      </pc:sldChg>
-      <pc:sldChg chg="modSp add del mod">
-        <pc:chgData name="Cooling, Chris" userId="6dcf99c9-2ba5-410a-8445-0893a3d1421f" providerId="ADAL" clId="{03CF33AC-D9E4-491F-8963-DAB5E6081A01}" dt="2024-10-09T08:23:15.889" v="66" actId="47"/>
-        <pc:sldMkLst>
-          <pc:docMk/>
-          <pc:sldMk cId="466020703" sldId="410"/>
-        </pc:sldMkLst>
-      </pc:sldChg>
-      <pc:sldChg chg="add del">
-        <pc:chgData name="Cooling, Chris" userId="6dcf99c9-2ba5-410a-8445-0893a3d1421f" providerId="ADAL" clId="{03CF33AC-D9E4-491F-8963-DAB5E6081A01}" dt="2024-10-09T08:23:15.889" v="66" actId="47"/>
-        <pc:sldMkLst>
-          <pc:docMk/>
-          <pc:sldMk cId="3649744382" sldId="411"/>
-        </pc:sldMkLst>
-      </pc:sldChg>
-      <pc:sldMasterChg chg="addSldLayout delSldLayout">
-        <pc:chgData name="Cooling, Chris" userId="6dcf99c9-2ba5-410a-8445-0893a3d1421f" providerId="ADAL" clId="{03CF33AC-D9E4-491F-8963-DAB5E6081A01}" dt="2024-10-09T08:23:15.889" v="66" actId="47"/>
-        <pc:sldMasterMkLst>
-          <pc:docMk/>
-          <pc:sldMasterMk cId="1145082161" sldId="2147483648"/>
-        </pc:sldMasterMkLst>
-        <pc:sldLayoutChg chg="add del">
-          <pc:chgData name="Cooling, Chris" userId="6dcf99c9-2ba5-410a-8445-0893a3d1421f" providerId="ADAL" clId="{03CF33AC-D9E4-491F-8963-DAB5E6081A01}" dt="2024-10-09T08:20:45.443" v="54" actId="47"/>
-          <pc:sldLayoutMkLst>
-            <pc:docMk/>
-            <pc:sldMasterMk cId="1145082161" sldId="2147483648"/>
-            <pc:sldLayoutMk cId="655195816" sldId="2147483725"/>
-          </pc:sldLayoutMkLst>
-        </pc:sldLayoutChg>
-        <pc:sldLayoutChg chg="del">
-          <pc:chgData name="Cooling, Chris" userId="6dcf99c9-2ba5-410a-8445-0893a3d1421f" providerId="ADAL" clId="{03CF33AC-D9E4-491F-8963-DAB5E6081A01}" dt="2024-10-09T08:21:13.232" v="55" actId="47"/>
-          <pc:sldLayoutMkLst>
-            <pc:docMk/>
-            <pc:sldMasterMk cId="1145082161" sldId="2147483648"/>
-            <pc:sldLayoutMk cId="729105091" sldId="2147483725"/>
-          </pc:sldLayoutMkLst>
-        </pc:sldLayoutChg>
-        <pc:sldLayoutChg chg="add">
-          <pc:chgData name="Cooling, Chris" userId="6dcf99c9-2ba5-410a-8445-0893a3d1421f" providerId="ADAL" clId="{03CF33AC-D9E4-491F-8963-DAB5E6081A01}" dt="2024-10-09T08:22:55.145" v="56" actId="27028"/>
-          <pc:sldLayoutMkLst>
-            <pc:docMk/>
-            <pc:sldMasterMk cId="1145082161" sldId="2147483648"/>
-            <pc:sldLayoutMk cId="2709431729" sldId="2147483725"/>
-          </pc:sldLayoutMkLst>
-        </pc:sldLayoutChg>
-        <pc:sldLayoutChg chg="add replId">
-          <pc:chgData name="Cooling, Chris" userId="6dcf99c9-2ba5-410a-8445-0893a3d1421f" providerId="ADAL" clId="{03CF33AC-D9E4-491F-8963-DAB5E6081A01}" dt="2024-10-09T08:22:55.145" v="56" actId="27028"/>
-          <pc:sldLayoutMkLst>
-            <pc:docMk/>
-            <pc:sldMasterMk cId="1145082161" sldId="2147483648"/>
-            <pc:sldLayoutMk cId="3934438464" sldId="2147483726"/>
-          </pc:sldLayoutMkLst>
-        </pc:sldLayoutChg>
-        <pc:sldLayoutChg chg="add del replId">
-          <pc:chgData name="Cooling, Chris" userId="6dcf99c9-2ba5-410a-8445-0893a3d1421f" providerId="ADAL" clId="{03CF33AC-D9E4-491F-8963-DAB5E6081A01}" dt="2024-10-09T08:23:15.889" v="66" actId="47"/>
-          <pc:sldLayoutMkLst>
-            <pc:docMk/>
-            <pc:sldMasterMk cId="1145082161" sldId="2147483648"/>
-            <pc:sldLayoutMk cId="1631762903" sldId="2147483727"/>
-          </pc:sldLayoutMkLst>
-        </pc:sldLayoutChg>
-      </pc:sldMasterChg>
     </pc:docChg>
   </pc:docChgLst>
 </pc:chgInfo>
@@ -2095,7 +295,7 @@
           <a:p>
             <a:fld id="{D2E0D2A8-8F95-47C2-ABE1-A779F5A43C98}" type="datetimeFigureOut">
               <a:rPr lang="en-US" smtClean="0"/>
-              <a:t>10/24/2025</a:t>
+              <a:t>10/9/2026</a:t>
             </a:fld>
             <a:endParaRPr lang="en-US"/>
           </a:p>
@@ -2998,7 +1198,7 @@
           <a:p>
             <a:fld id="{FAF350FB-607E-48F6-B352-925A009F2407}" type="datetime1">
               <a:rPr lang="en-GB" smtClean="0"/>
-              <a:t>24/10/2025</a:t>
+              <a:t>09/10/2026</a:t>
             </a:fld>
             <a:endParaRPr lang="en-GB"/>
           </a:p>
@@ -3324,7 +1524,7 @@
           <a:p>
             <a:fld id="{CF8C0F6D-2CAD-40E7-8816-197D4CFD57EA}" type="datetime1">
               <a:rPr lang="en-GB" smtClean="0"/>
-              <a:t>24/10/2025</a:t>
+              <a:t>09/10/2026</a:t>
             </a:fld>
             <a:endParaRPr lang="en-GB"/>
           </a:p>
@@ -3652,7 +1852,7 @@
           <a:p>
             <a:fld id="{29F29E7B-5C6D-410C-BA5A-90F82E614BA9}" type="datetime1">
               <a:rPr lang="en-GB" smtClean="0"/>
-              <a:t>24/10/2025</a:t>
+              <a:t>09/10/2026</a:t>
             </a:fld>
             <a:endParaRPr lang="en-GB"/>
           </a:p>
@@ -4028,7 +2228,7 @@
           <a:p>
             <a:fld id="{F78C03D5-07B1-49A6-9D03-E6F483086CF3}" type="datetime1">
               <a:rPr lang="en-GB" smtClean="0"/>
-              <a:t>24/10/2025</a:t>
+              <a:t>09/10/2026</a:t>
             </a:fld>
             <a:endParaRPr lang="en-GB"/>
           </a:p>
@@ -4412,7 +2612,7 @@
           <a:p>
             <a:fld id="{11D9606B-196D-49F6-A804-81695D9AB71C}" type="datetime1">
               <a:rPr lang="en-GB" smtClean="0"/>
-              <a:t>24/10/2025</a:t>
+              <a:t>09/10/2026</a:t>
             </a:fld>
             <a:endParaRPr lang="en-GB"/>
           </a:p>
@@ -4798,7 +2998,7 @@
           <a:p>
             <a:fld id="{6234B911-EE3B-464D-A82A-03386C191734}" type="datetime1">
               <a:rPr lang="en-GB" smtClean="0"/>
-              <a:t>24/10/2025</a:t>
+              <a:t>09/10/2026</a:t>
             </a:fld>
             <a:endParaRPr lang="en-GB"/>
           </a:p>
@@ -5026,7 +3226,7 @@
           <a:p>
             <a:fld id="{5A7EDF3F-69B2-443C-ABFC-2506B6B9B4A3}" type="datetime1">
               <a:rPr lang="en-GB" smtClean="0"/>
-              <a:t>24/10/2025</a:t>
+              <a:t>09/10/2026</a:t>
             </a:fld>
             <a:endParaRPr lang="en-GB"/>
           </a:p>
@@ -5524,7 +3724,7 @@
           <a:p>
             <a:fld id="{B7865CE2-1788-4C70-8660-CE6112A66C1C}" type="datetime1">
               <a:rPr lang="en-GB" smtClean="0"/>
-              <a:t>24/10/2025</a:t>
+              <a:t>09/10/2026</a:t>
             </a:fld>
             <a:endParaRPr lang="en-GB"/>
           </a:p>
@@ -6024,7 +4224,7 @@
           <a:p>
             <a:fld id="{06705E9D-BB37-43E7-B04D-AC709FAE6E06}" type="datetime1">
               <a:rPr lang="en-GB" smtClean="0"/>
-              <a:t>24/10/2025</a:t>
+              <a:t>09/10/2026</a:t>
             </a:fld>
             <a:endParaRPr lang="en-GB"/>
           </a:p>
@@ -6514,7 +4714,7 @@
           <a:p>
             <a:fld id="{614AA2CB-5711-4AE2-A72C-0CFFF46AB651}" type="datetime1">
               <a:rPr lang="en-GB" smtClean="0"/>
-              <a:t>24/10/2025</a:t>
+              <a:t>09/10/2026</a:t>
             </a:fld>
             <a:endParaRPr lang="en-GB"/>
           </a:p>
@@ -7325,7 +5525,7 @@
           <a:p>
             <a:fld id="{613D24FF-199D-4164-827A-6989A9C98BCC}" type="datetime1">
               <a:rPr lang="en-GB" smtClean="0"/>
-              <a:t>24/10/2025</a:t>
+              <a:t>09/10/2026</a:t>
             </a:fld>
             <a:endParaRPr lang="en-GB"/>
           </a:p>
@@ -7942,7 +6142,7 @@
           <a:p>
             <a:fld id="{D3648B21-6ED8-4577-9E0B-18FEFD97DD0D}" type="datetime1">
               <a:rPr lang="en-GB" smtClean="0"/>
-              <a:t>24/10/2025</a:t>
+              <a:t>09/10/2026</a:t>
             </a:fld>
             <a:endParaRPr lang="en-GB"/>
           </a:p>
@@ -8562,7 +6762,7 @@
           <a:p>
             <a:fld id="{C29934A5-F022-4149-AAAC-0C859B12A31B}" type="datetime1">
               <a:rPr lang="en-GB" smtClean="0"/>
-              <a:t>24/10/2025</a:t>
+              <a:t>09/10/2026</a:t>
             </a:fld>
             <a:endParaRPr lang="en-GB"/>
           </a:p>
@@ -8733,7 +6933,7 @@
           <a:p>
             <a:fld id="{7D1E684F-9A08-448C-BED5-6F327716686E}" type="datetime1">
               <a:rPr lang="en-GB" smtClean="0"/>
-              <a:t>24/10/2025</a:t>
+              <a:t>09/10/2026</a:t>
             </a:fld>
             <a:endParaRPr lang="en-GB"/>
           </a:p>
@@ -8906,7 +7106,7 @@
           <a:p>
             <a:fld id="{585D5200-F787-4750-A0F0-A336E182065C}" type="datetime1">
               <a:rPr lang="en-GB" smtClean="0"/>
-              <a:t>24/10/2025</a:t>
+              <a:t>09/10/2026</a:t>
             </a:fld>
             <a:endParaRPr lang="en-GB"/>
           </a:p>
@@ -9085,7 +7285,7 @@
           <a:p>
             <a:fld id="{32FCD787-FC19-480B-8572-82178477D89C}" type="datetime1">
               <a:rPr lang="en-GB" smtClean="0"/>
-              <a:t>24/10/2025</a:t>
+              <a:t>09/10/2026</a:t>
             </a:fld>
             <a:endParaRPr lang="en-GB" dirty="0"/>
           </a:p>
@@ -9279,7 +7479,7 @@
           <a:p>
             <a:fld id="{82257F49-A392-4F57-9176-82CC576F6401}" type="datetime1">
               <a:rPr lang="en-GB" smtClean="0"/>
-              <a:t>24/10/2025</a:t>
+              <a:t>09/10/2026</a:t>
             </a:fld>
             <a:endParaRPr lang="en-GB" dirty="0"/>
           </a:p>
@@ -9559,7 +7759,7 @@
           <a:p>
             <a:fld id="{65F76460-94B8-482C-A25F-539DD17561C9}" type="datetime1">
               <a:rPr lang="en-GB" smtClean="0"/>
-              <a:t>24/10/2025</a:t>
+              <a:t>09/10/2026</a:t>
             </a:fld>
             <a:endParaRPr lang="en-GB" dirty="0"/>
           </a:p>
@@ -9840,7 +8040,7 @@
           <a:p>
             <a:fld id="{A374679A-5507-46DF-9523-DEF9F407BDD1}" type="datetime1">
               <a:rPr lang="en-GB" smtClean="0"/>
-              <a:t>24/10/2025</a:t>
+              <a:t>09/10/2026</a:t>
             </a:fld>
             <a:endParaRPr lang="en-GB" dirty="0"/>
           </a:p>
@@ -10120,7 +8320,7 @@
           <a:p>
             <a:fld id="{5F9930A6-A8A2-443A-85C8-77AE7115E22C}" type="datetime1">
               <a:rPr lang="en-GB" smtClean="0"/>
-              <a:t>24/10/2025</a:t>
+              <a:t>09/10/2026</a:t>
             </a:fld>
             <a:endParaRPr lang="en-GB" dirty="0"/>
           </a:p>
@@ -10596,7 +8796,7 @@
           <a:p>
             <a:fld id="{4C33DE77-94DC-4F56-B8E0-B57A71BE9C1B}" type="datetime1">
               <a:rPr lang="en-GB" smtClean="0"/>
-              <a:t>24/10/2025</a:t>
+              <a:t>09/10/2026</a:t>
             </a:fld>
             <a:endParaRPr lang="en-GB" dirty="0"/>
           </a:p>
@@ -10876,7 +9076,7 @@
           <a:p>
             <a:fld id="{C4368611-C6D7-4D57-BFBC-83364362825D}" type="datetime1">
               <a:rPr lang="en-GB" smtClean="0"/>
-              <a:t>24/10/2025</a:t>
+              <a:t>09/10/2026</a:t>
             </a:fld>
             <a:endParaRPr lang="en-GB" dirty="0"/>
           </a:p>
@@ -11156,7 +9356,7 @@
           <a:p>
             <a:fld id="{44EB1988-F948-4F42-95D0-4980219C3D30}" type="datetime1">
               <a:rPr lang="en-GB" smtClean="0"/>
-              <a:t>24/10/2025</a:t>
+              <a:t>09/10/2026</a:t>
             </a:fld>
             <a:endParaRPr lang="en-GB" dirty="0"/>
           </a:p>
@@ -11420,7 +9620,7 @@
           <a:p>
             <a:fld id="{335FC955-64F0-4C8C-81A3-364FF2C3C78A}" type="datetime1">
               <a:rPr lang="en-GB" smtClean="0"/>
-              <a:t>24/10/2025</a:t>
+              <a:t>09/10/2026</a:t>
             </a:fld>
             <a:endParaRPr lang="en-GB"/>
           </a:p>
@@ -11808,7 +10008,7 @@
           <a:p>
             <a:fld id="{0BB8103B-753A-448B-AF6B-43077BE30C48}" type="datetime1">
               <a:rPr lang="en-GB" smtClean="0"/>
-              <a:t>24/10/2025</a:t>
+              <a:t>09/10/2026</a:t>
             </a:fld>
             <a:endParaRPr lang="en-GB"/>
           </a:p>
@@ -12190,7 +10390,7 @@
           <a:p>
             <a:fld id="{0E660D43-C370-438B-994B-3E64E42A492F}" type="datetime1">
               <a:rPr lang="en-GB" smtClean="0"/>
-              <a:t>24/10/2025</a:t>
+              <a:t>09/10/2026</a:t>
             </a:fld>
             <a:endParaRPr lang="en-GB"/>
           </a:p>
@@ -12562,7 +10762,7 @@
           <a:p>
             <a:fld id="{96853DBC-7CDC-4499-AD45-D68113A07BDF}" type="datetime1">
               <a:rPr lang="en-GB" smtClean="0"/>
-              <a:t>24/10/2025</a:t>
+              <a:t>09/10/2026</a:t>
             </a:fld>
             <a:endParaRPr lang="en-GB"/>
           </a:p>
@@ -12969,7 +11169,7 @@
           <a:p>
             <a:fld id="{55816C37-CA97-4AD3-9C73-2949A988C5B3}" type="datetime1">
               <a:rPr lang="en-GB" smtClean="0"/>
-              <a:t>24/10/2025</a:t>
+              <a:t>09/10/2026</a:t>
             </a:fld>
             <a:endParaRPr lang="en-GB"/>
           </a:p>
@@ -13378,7 +11578,7 @@
           <a:p>
             <a:fld id="{573484D4-9508-4033-8277-6C19B2FC68CD}" type="datetime1">
               <a:rPr lang="en-GB" smtClean="0"/>
-              <a:t>24/10/2025</a:t>
+              <a:t>09/10/2026</a:t>
             </a:fld>
             <a:endParaRPr lang="en-GB"/>
           </a:p>
@@ -13777,7 +11977,7 @@
           <a:p>
             <a:fld id="{189DC00A-CD68-400A-9806-2BBF3CC0C6DA}" type="datetime1">
               <a:rPr lang="en-GB" smtClean="0"/>
-              <a:t>24/10/2025</a:t>
+              <a:t>09/10/2026</a:t>
             </a:fld>
             <a:endParaRPr lang="en-GB"/>
           </a:p>
@@ -14575,7 +12775,7 @@
           <a:p>
             <a:fld id="{AA0D9559-A426-4E1F-AFC6-6EE424A7DE44}" type="datetime1">
               <a:rPr lang="en-GB" smtClean="0"/>
-              <a:t>24/10/2025</a:t>
+              <a:t>09/10/2026</a:t>
             </a:fld>
             <a:endParaRPr lang="en-GB"/>
           </a:p>
@@ -15179,7 +13379,7 @@
           <a:p>
             <a:fld id="{CAB15FCA-92F0-49A6-B6F1-5BB6A2FB96EB}" type="datetime1">
               <a:rPr lang="en-GB" smtClean="0"/>
-              <a:t>24/10/2025</a:t>
+              <a:t>09/10/2026</a:t>
             </a:fld>
             <a:endParaRPr lang="en-GB"/>
           </a:p>
@@ -15773,7 +13973,7 @@
           <a:p>
             <a:fld id="{48DA1288-ABF3-4FF8-8879-48218C532F72}" type="datetime1">
               <a:rPr lang="en-GB" smtClean="0"/>
-              <a:t>24/10/2025</a:t>
+              <a:t>09/10/2026</a:t>
             </a:fld>
             <a:endParaRPr lang="en-GB"/>
           </a:p>
@@ -16110,7 +14310,7 @@
           <a:p>
             <a:fld id="{3463497E-A8CD-4CEB-9AB5-26F78642B93F}" type="datetime1">
               <a:rPr lang="en-GB" smtClean="0"/>
-              <a:t>24/10/2025</a:t>
+              <a:t>09/10/2026</a:t>
             </a:fld>
             <a:endParaRPr lang="en-GB"/>
           </a:p>
@@ -16449,7 +14649,7 @@
           <a:p>
             <a:fld id="{3AD0DEC8-2921-4E52-A8FC-5C2F8E2FE9B4}" type="datetime1">
               <a:rPr lang="en-GB" smtClean="0"/>
-              <a:t>24/10/2025</a:t>
+              <a:t>09/10/2026</a:t>
             </a:fld>
             <a:endParaRPr lang="en-GB"/>
           </a:p>
@@ -16778,7 +14978,7 @@
           <a:p>
             <a:fld id="{DF9F60F0-99AD-4729-A690-A2594EE3B2F7}" type="datetime1">
               <a:rPr lang="en-GB" smtClean="0"/>
-              <a:t>24/10/2025</a:t>
+              <a:t>09/10/2026</a:t>
             </a:fld>
             <a:endParaRPr lang="en-GB"/>
           </a:p>
@@ -17115,7 +15315,7 @@
           <a:p>
             <a:fld id="{52C52FF3-83FD-4D43-A69A-C1E39B84A578}" type="datetime1">
               <a:rPr lang="en-GB" smtClean="0"/>
-              <a:t>24/10/2025</a:t>
+              <a:t>09/10/2026</a:t>
             </a:fld>
             <a:endParaRPr lang="en-GB"/>
           </a:p>
@@ -17454,7 +15654,7 @@
           <a:p>
             <a:fld id="{55C9AFFA-8DB2-4812-96BA-17E7D1ADCBD8}" type="datetime1">
               <a:rPr lang="en-GB" smtClean="0"/>
-              <a:t>24/10/2025</a:t>
+              <a:t>09/10/2026</a:t>
             </a:fld>
             <a:endParaRPr lang="en-GB"/>
           </a:p>
@@ -17783,7 +15983,7 @@
           <a:p>
             <a:fld id="{7647F342-4248-4FB1-A938-9688BF0062AA}" type="datetime1">
               <a:rPr lang="en-GB" smtClean="0"/>
-              <a:t>24/10/2025</a:t>
+              <a:t>09/10/2026</a:t>
             </a:fld>
             <a:endParaRPr lang="en-GB"/>
           </a:p>
@@ -18021,7 +16221,7 @@
           <a:p>
             <a:fld id="{2DBB5BAE-2936-42C2-953B-9323D144D48F}" type="datetime1">
               <a:rPr lang="en-GB" smtClean="0"/>
-              <a:t>24/10/2025</a:t>
+              <a:t>09/10/2026</a:t>
             </a:fld>
             <a:endParaRPr lang="en-GB"/>
           </a:p>
@@ -18457,7 +16657,7 @@
           <a:p>
             <a:fld id="{8416A20B-0065-40A6-BB21-BDB11E67847E}" type="datetime1">
               <a:rPr lang="en-GB" smtClean="0"/>
-              <a:t>24/10/2025</a:t>
+              <a:t>09/10/2026</a:t>
             </a:fld>
             <a:endParaRPr lang="en-GB"/>
           </a:p>
@@ -18995,7 +17195,7 @@
           <a:p>
             <a:fld id="{3C149ABA-BA00-49F0-AB6C-579A76DE81A9}" type="datetime1">
               <a:rPr lang="en-GB" smtClean="0"/>
-              <a:t>24/10/2025</a:t>
+              <a:t>09/10/2026</a:t>
             </a:fld>
             <a:endParaRPr lang="en-GB"/>
           </a:p>
@@ -19274,7 +17474,7 @@
           <a:p>
             <a:fld id="{FEC31C98-8479-4828-BB5C-30B196EE3328}" type="datetime1">
               <a:rPr lang="en-GB" smtClean="0"/>
-              <a:t>24/10/2025</a:t>
+              <a:t>09/10/2026</a:t>
             </a:fld>
             <a:endParaRPr lang="en-GB"/>
           </a:p>
@@ -19559,7 +17759,7 @@
           <a:p>
             <a:fld id="{208D48B8-3660-4BCE-936E-EDD9878A69D7}" type="datetime1">
               <a:rPr lang="en-GB" smtClean="0"/>
-              <a:t>24/10/2025</a:t>
+              <a:t>09/10/2026</a:t>
             </a:fld>
             <a:endParaRPr lang="en-GB"/>
           </a:p>
@@ -19852,7 +18052,7 @@
           <a:p>
             <a:fld id="{6151B4A7-045E-4F54-89B5-6C85E0E9F06F}" type="datetime1">
               <a:rPr lang="en-GB" smtClean="0"/>
-              <a:t>24/10/2025</a:t>
+              <a:t>09/10/2026</a:t>
             </a:fld>
             <a:endParaRPr lang="en-GB"/>
           </a:p>
@@ -20269,7 +18469,7 @@
           <a:p>
             <a:fld id="{0C7394F2-6A79-4799-9504-CB984DD0A702}" type="datetime1">
               <a:rPr lang="en-GB" smtClean="0"/>
-              <a:t>24/10/2025</a:t>
+              <a:t>09/10/2026</a:t>
             </a:fld>
             <a:endParaRPr lang="en-GB" dirty="0"/>
           </a:p>
@@ -21070,7 +19270,7 @@
           <a:p>
             <a:fld id="{F9409C4F-AE5B-411C-A303-00D73C3F3F54}" type="datetime1">
               <a:rPr lang="en-GB" smtClean="0"/>
-              <a:t>24/10/2025</a:t>
+              <a:t>09/10/2026</a:t>
             </a:fld>
             <a:endParaRPr lang="en-GB"/>
           </a:p>
@@ -21374,7 +19574,7 @@
           <a:p>
             <a:fld id="{B0B4787F-07F8-4B97-8171-1C77C09DEA4C}" type="datetime1">
               <a:rPr lang="en-GB" smtClean="0"/>
-              <a:t>24/10/2025</a:t>
+              <a:t>09/10/2026</a:t>
             </a:fld>
             <a:endParaRPr lang="en-GB"/>
           </a:p>
@@ -21710,7 +19910,7 @@
           <a:p>
             <a:fld id="{483A4E1F-9BA6-475E-A9BD-8EA1A7E86E14}" type="datetime1">
               <a:rPr lang="en-GB" smtClean="0"/>
-              <a:t>24/10/2025</a:t>
+              <a:t>09/10/2026</a:t>
             </a:fld>
             <a:endParaRPr lang="en-GB"/>
           </a:p>
@@ -21880,7 +20080,7 @@
           <a:p>
             <a:fld id="{DBF64851-09F6-4432-9B2A-09AAFE64E389}" type="datetime1">
               <a:rPr lang="en-GB" smtClean="0"/>
-              <a:t>24/10/2025</a:t>
+              <a:t>09/10/2026</a:t>
             </a:fld>
             <a:endParaRPr lang="en-GB"/>
           </a:p>
@@ -22364,7 +20564,7 @@
           <a:p>
             <a:fld id="{C1488ADB-11DD-4A55-AEA4-878F0F9346A7}" type="datetime1">
               <a:rPr lang="en-GB" smtClean="0"/>
-              <a:t>24/10/2025</a:t>
+              <a:t>09/10/2026</a:t>
             </a:fld>
             <a:endParaRPr lang="en-GB"/>
           </a:p>
@@ -22431,67 +20631,6 @@
       </p:sp>
       <p:sp>
         <p:nvSpPr>
-          <p:cNvPr id="3" name="Content Placeholder 2">
-            <a:extLst>
-              <a:ext uri="{FF2B5EF4-FFF2-40B4-BE49-F238E27FC236}">
-                <a16:creationId xmlns:a16="http://schemas.microsoft.com/office/drawing/2014/main" id="{20C7DBC8-6B4B-6860-9339-77D08AD9EA11}"/>
-              </a:ext>
-            </a:extLst>
-          </p:cNvPr>
-          <p:cNvSpPr>
-            <a:spLocks noGrp="1"/>
-          </p:cNvSpPr>
-          <p:nvPr>
-            <p:ph idx="1"/>
-          </p:nvPr>
-        </p:nvSpPr>
-        <p:spPr/>
-        <p:txBody>
-          <a:bodyPr/>
-          <a:lstStyle/>
-          <a:p>
-            <a:r>
-              <a:rPr lang="en-GB" dirty="0"/>
-              <a:t> </a:t>
-            </a:r>
-          </a:p>
-          <a:p>
-            <a:endParaRPr lang="en-GB" dirty="0"/>
-          </a:p>
-          <a:p>
-            <a:endParaRPr lang="en-GB" dirty="0"/>
-          </a:p>
-          <a:p>
-            <a:endParaRPr lang="en-GB" dirty="0"/>
-          </a:p>
-          <a:p>
-            <a:endParaRPr lang="en-GB" dirty="0"/>
-          </a:p>
-          <a:p>
-            <a:endParaRPr lang="en-GB" dirty="0"/>
-          </a:p>
-          <a:p>
-            <a:endParaRPr lang="en-GB" dirty="0"/>
-          </a:p>
-          <a:p>
-            <a:endParaRPr lang="en-GB" dirty="0"/>
-          </a:p>
-          <a:p>
-            <a:endParaRPr lang="en-GB" dirty="0"/>
-          </a:p>
-          <a:p>
-            <a:endParaRPr lang="en-GB" dirty="0"/>
-          </a:p>
-          <a:p>
-            <a:endParaRPr lang="en-GB" dirty="0"/>
-          </a:p>
-          <a:p>
-            <a:endParaRPr lang="en-GB" dirty="0"/>
-          </a:p>
-        </p:txBody>
-      </p:sp>
-      <p:sp>
-        <p:nvSpPr>
           <p:cNvPr id="6" name="Content Placeholder 5">
             <a:extLst>
               <a:ext uri="{FF2B5EF4-FFF2-40B4-BE49-F238E27FC236}">
@@ -22535,19 +20674,12 @@
               <a:t>The link is </a:t>
             </a:r>
             <a:r>
-              <a:rPr lang="en-GB" sz="2800" u="sng" dirty="0">
-                <a:solidFill>
-                  <a:srgbClr val="0563C1"/>
-                </a:solidFill>
+              <a:rPr lang="en-GB" sz="2800" dirty="0">
                 <a:hlinkClick r:id="rId3"/>
               </a:rPr>
-              <a:t>https://ecri.short.gy/feedback-rcds</a:t>
-            </a:r>
-            <a:endParaRPr lang="en-GB" sz="2800" u="sng" dirty="0">
-              <a:solidFill>
-                <a:srgbClr val="0563C1"/>
-              </a:solidFill>
-            </a:endParaRPr>
+              <a:t>https://ecri.short.gy/feedback-num-comp-py</a:t>
+            </a:r>
+            <a:endParaRPr lang="en-GB" sz="2800" dirty="0"/>
           </a:p>
           <a:p>
             <a:pPr marL="457200" lvl="1" indent="-457200">
@@ -22576,10 +20708,10 @@
       </p:sp>
       <p:pic>
         <p:nvPicPr>
-          <p:cNvPr id="10" name="Picture 9" descr="A qr code on a white background&#10;&#10;AI-generated content may be incorrect.">
-            <a:extLst>
-              <a:ext uri="{FF2B5EF4-FFF2-40B4-BE49-F238E27FC236}">
-                <a16:creationId xmlns:a16="http://schemas.microsoft.com/office/drawing/2014/main" id="{A20E0870-387C-038E-2FE2-610F7CDA6BCB}"/>
+          <p:cNvPr id="12" name="Picture 11">
+            <a:extLst>
+              <a:ext uri="{FF2B5EF4-FFF2-40B4-BE49-F238E27FC236}">
+                <a16:creationId xmlns:a16="http://schemas.microsoft.com/office/drawing/2014/main" id="{F304293B-9097-C094-8B63-0AD5D0849CFF}"/>
               </a:ext>
             </a:extLst>
           </p:cNvPr>
@@ -22602,8 +20734,8 @@
         </p:blipFill>
         <p:spPr>
           <a:xfrm>
-            <a:off x="395679" y="1030778"/>
-            <a:ext cx="5122585" cy="5122585"/>
+            <a:off x="325799" y="876299"/>
+            <a:ext cx="5211679" cy="5211679"/>
           </a:xfrm>
           <a:prstGeom prst="rect">
             <a:avLst/>
